--- a/教学实施资料/说课PPT/Python编程基础-课程整体说课（15分钟）.pptx
+++ b/教学实施资料/说课PPT/Python编程基础-课程整体说课（15分钟）.pptx
@@ -16797,8 +16797,8 @@
         </p:nvSpPr>
         <p:spPr>
           <a:xfrm>
-            <a:off x="760000" y="1600000"/>
-            <a:ext cx="5150000" cy="1150000"/>
+            <a:off x="536000" y="1720000"/>
+            <a:ext cx="3520000" cy="1500000"/>
           </a:xfrm>
           <a:prstGeom prst="rect">
             <a:avLst/>
@@ -16843,8 +16843,8 @@
         </p:nvSpPr>
         <p:spPr>
           <a:xfrm>
-            <a:off x="760000" y="1600000"/>
-            <a:ext cx="820000" cy="1150000"/>
+            <a:off x="536000" y="1720000"/>
+            <a:ext cx="3520000" cy="380000"/>
           </a:xfrm>
           <a:prstGeom prst="rect">
             <a:avLst/>
@@ -16887,8 +16887,8 @@
         </p:nvSpPr>
         <p:spPr>
           <a:xfrm>
-            <a:off x="760000" y="1890000"/>
-            <a:ext cx="820000" cy="560000"/>
+            <a:off x="696000" y="1760000"/>
+            <a:ext cx="1300000" cy="320000"/>
           </a:xfrm>
           <a:prstGeom prst="rect">
             <a:avLst/>
@@ -16901,7 +16901,7 @@
           </a:bodyPr>
           <a:lstStyle/>
           <a:p>
-            <a:pPr algn="ctr">
+            <a:pPr algn="l">
               <a:lnSpc>
                 <a:spcPct val="110000"/>
               </a:lnSpc>
@@ -16910,7 +16910,7 @@
               </a:spcAft>
             </a:pPr>
             <a:r>
-              <a:rPr sz="2200" b="1">
+              <a:rPr sz="2400" b="1">
                 <a:solidFill>
                   <a:srgbClr val="FFFFFF"/>
                 </a:solidFill>
@@ -16929,8 +16929,8 @@
         </p:nvSpPr>
         <p:spPr>
           <a:xfrm>
-            <a:off x="1740000" y="1680000"/>
-            <a:ext cx="4020000" cy="500000"/>
+            <a:off x="2036000" y="1800000"/>
+            <a:ext cx="1900000" cy="280000"/>
           </a:xfrm>
           <a:prstGeom prst="rect">
             <a:avLst/>
@@ -16943,7 +16943,7 @@
           </a:bodyPr>
           <a:lstStyle/>
           <a:p>
-            <a:pPr algn="l">
+            <a:pPr algn="r">
               <a:lnSpc>
                 <a:spcPct val="110000"/>
               </a:lnSpc>
@@ -16952,28 +16952,9 @@
               </a:spcAft>
             </a:pPr>
             <a:r>
-              <a:rPr sz="1550" b="1">
-                <a:solidFill>
-                  <a:srgbClr val="010328"/>
-                </a:solidFill>
-                <a:latin typeface="微软雅黑"/>
-              </a:rPr>
-              <a:t>课程定位</a:t>
-            </a:r>
-          </a:p>
-          <a:p>
-            <a:pPr algn="l">
-              <a:lnSpc>
-                <a:spcPct val="110000"/>
-              </a:lnSpc>
-              <a:spcAft>
-                <a:spcPts val="600"/>
-              </a:spcAft>
-            </a:pPr>
-            <a:r>
-              <a:rPr sz="1150" b="1">
-                <a:solidFill>
-                  <a:srgbClr val="0545E8"/>
+              <a:rPr sz="1200" b="1">
+                <a:solidFill>
+                  <a:srgbClr val="FFFFFF"/>
                 </a:solidFill>
                 <a:latin typeface="微软雅黑"/>
               </a:rPr>
@@ -16990,8 +16971,8 @@
         </p:nvSpPr>
         <p:spPr>
           <a:xfrm>
-            <a:off x="1740000" y="2250000"/>
-            <a:ext cx="4020000" cy="440000"/>
+            <a:off x="696000" y="2170000"/>
+            <a:ext cx="3220000" cy="420000"/>
           </a:xfrm>
           <a:prstGeom prst="rect">
             <a:avLst/>
@@ -17006,14 +16987,56 @@
           <a:p>
             <a:pPr algn="l">
               <a:lnSpc>
-                <a:spcPct val="115000"/>
-              </a:lnSpc>
-              <a:spcAft>
-                <a:spcPts val="600"/>
-              </a:spcAft>
-            </a:pPr>
-            <a:r>
-              <a:rPr sz="1100" b="0">
+                <a:spcPct val="110000"/>
+              </a:lnSpc>
+              <a:spcAft>
+                <a:spcPts val="600"/>
+              </a:spcAft>
+            </a:pPr>
+            <a:r>
+              <a:rPr sz="1700" b="1">
+                <a:solidFill>
+                  <a:srgbClr val="010328"/>
+                </a:solidFill>
+                <a:latin typeface="微软雅黑"/>
+              </a:rPr>
+              <a:t>课程定位</a:t>
+            </a:r>
+          </a:p>
+        </p:txBody>
+      </p:sp>
+      <p:sp>
+        <p:nvSpPr>
+          <p:cNvPr id="10" name="TextBox 9"/>
+          <p:cNvSpPr txBox="1"/>
+          <p:nvPr/>
+        </p:nvSpPr>
+        <p:spPr>
+          <a:xfrm>
+            <a:off x="696000" y="2600000"/>
+            <a:ext cx="3220000" cy="540000"/>
+          </a:xfrm>
+          <a:prstGeom prst="rect">
+            <a:avLst/>
+          </a:prstGeom>
+          <a:noFill/>
+        </p:spPr>
+        <p:txBody>
+          <a:bodyPr wrap="square" anchor="t">
+            <a:spAutoFit/>
+          </a:bodyPr>
+          <a:lstStyle/>
+          <a:p>
+            <a:pPr algn="l">
+              <a:lnSpc>
+                <a:spcPct val="118000"/>
+              </a:lnSpc>
+              <a:spcAft>
+                <a:spcPts val="600"/>
+              </a:spcAft>
+            </a:pPr>
+            <a:r>
+              <a:rPr sz="1150" b="0">
                 <a:solidFill>
                   <a:srgbClr val="44546A"/>
                 </a:solidFill>
@@ -17026,14 +17049,14 @@
       </p:sp>
       <p:sp>
         <p:nvSpPr>
-          <p:cNvPr id="10" name="Rectangle 9"/>
+          <p:cNvPr id="11" name="Rectangle 10"/>
           <p:cNvSpPr/>
           <p:nvPr/>
         </p:nvSpPr>
         <p:spPr>
           <a:xfrm>
-            <a:off x="6270000" y="1600000"/>
-            <a:ext cx="5150000" cy="1150000"/>
+            <a:off x="4336000" y="1720000"/>
+            <a:ext cx="3520000" cy="1500000"/>
           </a:xfrm>
           <a:prstGeom prst="rect">
             <a:avLst/>
@@ -17072,14 +17095,14 @@
       </p:sp>
       <p:sp>
         <p:nvSpPr>
-          <p:cNvPr id="11" name="Rectangle 10"/>
+          <p:cNvPr id="12" name="Rectangle 11"/>
           <p:cNvSpPr/>
           <p:nvPr/>
         </p:nvSpPr>
         <p:spPr>
           <a:xfrm>
-            <a:off x="6270000" y="1600000"/>
-            <a:ext cx="820000" cy="1150000"/>
+            <a:off x="4336000" y="1720000"/>
+            <a:ext cx="3520000" cy="380000"/>
           </a:xfrm>
           <a:prstGeom prst="rect">
             <a:avLst/>
@@ -17116,14 +17139,14 @@
       </p:sp>
       <p:sp>
         <p:nvSpPr>
-          <p:cNvPr id="12" name="TextBox 11"/>
+          <p:cNvPr id="13" name="TextBox 12"/>
           <p:cNvSpPr txBox="1"/>
           <p:nvPr/>
         </p:nvSpPr>
         <p:spPr>
           <a:xfrm>
-            <a:off x="6270000" y="1890000"/>
-            <a:ext cx="820000" cy="560000"/>
+            <a:off x="4496000" y="1760000"/>
+            <a:ext cx="1300000" cy="320000"/>
           </a:xfrm>
           <a:prstGeom prst="rect">
             <a:avLst/>
@@ -17136,7 +17159,7 @@
           </a:bodyPr>
           <a:lstStyle/>
           <a:p>
-            <a:pPr algn="ctr">
+            <a:pPr algn="l">
               <a:lnSpc>
                 <a:spcPct val="110000"/>
               </a:lnSpc>
@@ -17145,7 +17168,7 @@
               </a:spcAft>
             </a:pPr>
             <a:r>
-              <a:rPr sz="2200" b="1">
+              <a:rPr sz="2400" b="1">
                 <a:solidFill>
                   <a:srgbClr val="FFFFFF"/>
                 </a:solidFill>
@@ -17158,14 +17181,14 @@
       </p:sp>
       <p:sp>
         <p:nvSpPr>
-          <p:cNvPr id="13" name="TextBox 12"/>
+          <p:cNvPr id="14" name="TextBox 13"/>
           <p:cNvSpPr txBox="1"/>
           <p:nvPr/>
         </p:nvSpPr>
         <p:spPr>
           <a:xfrm>
-            <a:off x="7250000" y="1680000"/>
-            <a:ext cx="4020000" cy="500000"/>
+            <a:off x="5836000" y="1800000"/>
+            <a:ext cx="1900000" cy="280000"/>
           </a:xfrm>
           <a:prstGeom prst="rect">
             <a:avLst/>
@@ -17178,7 +17201,7 @@
           </a:bodyPr>
           <a:lstStyle/>
           <a:p>
-            <a:pPr algn="l">
+            <a:pPr algn="r">
               <a:lnSpc>
                 <a:spcPct val="110000"/>
               </a:lnSpc>
@@ -17187,28 +17210,9 @@
               </a:spcAft>
             </a:pPr>
             <a:r>
-              <a:rPr sz="1550" b="1">
-                <a:solidFill>
-                  <a:srgbClr val="010328"/>
-                </a:solidFill>
-                <a:latin typeface="微软雅黑"/>
-              </a:rPr>
-              <a:t>学情分析</a:t>
-            </a:r>
-          </a:p>
-          <a:p>
-            <a:pPr algn="l">
-              <a:lnSpc>
-                <a:spcPct val="110000"/>
-              </a:lnSpc>
-              <a:spcAft>
-                <a:spcPts val="600"/>
-              </a:spcAft>
-            </a:pPr>
-            <a:r>
-              <a:rPr sz="1150" b="1">
-                <a:solidFill>
-                  <a:srgbClr val="0545E8"/>
+              <a:rPr sz="1200" b="1">
+                <a:solidFill>
+                  <a:srgbClr val="FFFFFF"/>
                 </a:solidFill>
                 <a:latin typeface="微软雅黑"/>
               </a:rPr>
@@ -17219,14 +17223,14 @@
       </p:sp>
       <p:sp>
         <p:nvSpPr>
-          <p:cNvPr id="14" name="TextBox 13"/>
+          <p:cNvPr id="15" name="TextBox 14"/>
           <p:cNvSpPr txBox="1"/>
           <p:nvPr/>
         </p:nvSpPr>
         <p:spPr>
           <a:xfrm>
-            <a:off x="7250000" y="2250000"/>
-            <a:ext cx="4020000" cy="440000"/>
+            <a:off x="4496000" y="2170000"/>
+            <a:ext cx="3220000" cy="420000"/>
           </a:xfrm>
           <a:prstGeom prst="rect">
             <a:avLst/>
@@ -17241,14 +17245,56 @@
           <a:p>
             <a:pPr algn="l">
               <a:lnSpc>
-                <a:spcPct val="115000"/>
-              </a:lnSpc>
-              <a:spcAft>
-                <a:spcPts val="600"/>
-              </a:spcAft>
-            </a:pPr>
-            <a:r>
-              <a:rPr sz="1100" b="0">
+                <a:spcPct val="110000"/>
+              </a:lnSpc>
+              <a:spcAft>
+                <a:spcPts val="600"/>
+              </a:spcAft>
+            </a:pPr>
+            <a:r>
+              <a:rPr sz="1700" b="1">
+                <a:solidFill>
+                  <a:srgbClr val="010328"/>
+                </a:solidFill>
+                <a:latin typeface="微软雅黑"/>
+              </a:rPr>
+              <a:t>学情分析</a:t>
+            </a:r>
+          </a:p>
+        </p:txBody>
+      </p:sp>
+      <p:sp>
+        <p:nvSpPr>
+          <p:cNvPr id="16" name="TextBox 15"/>
+          <p:cNvSpPr txBox="1"/>
+          <p:nvPr/>
+        </p:nvSpPr>
+        <p:spPr>
+          <a:xfrm>
+            <a:off x="4496000" y="2600000"/>
+            <a:ext cx="3220000" cy="540000"/>
+          </a:xfrm>
+          <a:prstGeom prst="rect">
+            <a:avLst/>
+          </a:prstGeom>
+          <a:noFill/>
+        </p:spPr>
+        <p:txBody>
+          <a:bodyPr wrap="square" anchor="t">
+            <a:spAutoFit/>
+          </a:bodyPr>
+          <a:lstStyle/>
+          <a:p>
+            <a:pPr algn="l">
+              <a:lnSpc>
+                <a:spcPct val="118000"/>
+              </a:lnSpc>
+              <a:spcAft>
+                <a:spcPts val="600"/>
+              </a:spcAft>
+            </a:pPr>
+            <a:r>
+              <a:rPr sz="1150" b="0">
                 <a:solidFill>
                   <a:srgbClr val="44546A"/>
                 </a:solidFill>
@@ -17261,14 +17307,14 @@
       </p:sp>
       <p:sp>
         <p:nvSpPr>
-          <p:cNvPr id="15" name="Rectangle 14"/>
+          <p:cNvPr id="17" name="Rectangle 16"/>
           <p:cNvSpPr/>
           <p:nvPr/>
         </p:nvSpPr>
         <p:spPr>
           <a:xfrm>
-            <a:off x="760000" y="2930000"/>
-            <a:ext cx="5150000" cy="1150000"/>
+            <a:off x="8136000" y="1720000"/>
+            <a:ext cx="3520000" cy="1500000"/>
           </a:xfrm>
           <a:prstGeom prst="rect">
             <a:avLst/>
@@ -17307,14 +17353,14 @@
       </p:sp>
       <p:sp>
         <p:nvSpPr>
-          <p:cNvPr id="16" name="Rectangle 15"/>
+          <p:cNvPr id="18" name="Rectangle 17"/>
           <p:cNvSpPr/>
           <p:nvPr/>
         </p:nvSpPr>
         <p:spPr>
           <a:xfrm>
-            <a:off x="760000" y="2930000"/>
-            <a:ext cx="820000" cy="1150000"/>
+            <a:off x="8136000" y="1720000"/>
+            <a:ext cx="3520000" cy="380000"/>
           </a:xfrm>
           <a:prstGeom prst="rect">
             <a:avLst/>
@@ -17351,14 +17397,14 @@
       </p:sp>
       <p:sp>
         <p:nvSpPr>
-          <p:cNvPr id="17" name="TextBox 16"/>
+          <p:cNvPr id="19" name="TextBox 18"/>
           <p:cNvSpPr txBox="1"/>
           <p:nvPr/>
         </p:nvSpPr>
         <p:spPr>
           <a:xfrm>
-            <a:off x="760000" y="3220000"/>
-            <a:ext cx="820000" cy="560000"/>
+            <a:off x="8296000" y="1760000"/>
+            <a:ext cx="1300000" cy="320000"/>
           </a:xfrm>
           <a:prstGeom prst="rect">
             <a:avLst/>
@@ -17371,7 +17417,7 @@
           </a:bodyPr>
           <a:lstStyle/>
           <a:p>
-            <a:pPr algn="ctr">
+            <a:pPr algn="l">
               <a:lnSpc>
                 <a:spcPct val="110000"/>
               </a:lnSpc>
@@ -17380,7 +17426,7 @@
               </a:spcAft>
             </a:pPr>
             <a:r>
-              <a:rPr sz="2200" b="1">
+              <a:rPr sz="2400" b="1">
                 <a:solidFill>
                   <a:srgbClr val="FFFFFF"/>
                 </a:solidFill>
@@ -17393,14 +17439,14 @@
       </p:sp>
       <p:sp>
         <p:nvSpPr>
-          <p:cNvPr id="18" name="TextBox 17"/>
+          <p:cNvPr id="20" name="TextBox 19"/>
           <p:cNvSpPr txBox="1"/>
           <p:nvPr/>
         </p:nvSpPr>
         <p:spPr>
           <a:xfrm>
-            <a:off x="1740000" y="3010000"/>
-            <a:ext cx="4020000" cy="500000"/>
+            <a:off x="9636000" y="1800000"/>
+            <a:ext cx="1900000" cy="280000"/>
           </a:xfrm>
           <a:prstGeom prst="rect">
             <a:avLst/>
@@ -17413,7 +17459,7 @@
           </a:bodyPr>
           <a:lstStyle/>
           <a:p>
-            <a:pPr algn="l">
+            <a:pPr algn="r">
               <a:lnSpc>
                 <a:spcPct val="110000"/>
               </a:lnSpc>
@@ -17422,28 +17468,9 @@
               </a:spcAft>
             </a:pPr>
             <a:r>
-              <a:rPr sz="1550" b="1">
-                <a:solidFill>
-                  <a:srgbClr val="010328"/>
-                </a:solidFill>
-                <a:latin typeface="微软雅黑"/>
-              </a:rPr>
-              <a:t>课程目标</a:t>
-            </a:r>
-          </a:p>
-          <a:p>
-            <a:pPr algn="l">
-              <a:lnSpc>
-                <a:spcPct val="110000"/>
-              </a:lnSpc>
-              <a:spcAft>
-                <a:spcPts val="600"/>
-              </a:spcAft>
-            </a:pPr>
-            <a:r>
-              <a:rPr sz="1150" b="1">
-                <a:solidFill>
-                  <a:srgbClr val="0545E8"/>
+              <a:rPr sz="1200" b="1">
+                <a:solidFill>
+                  <a:srgbClr val="FFFFFF"/>
                 </a:solidFill>
                 <a:latin typeface="微软雅黑"/>
               </a:rPr>
@@ -17454,14 +17481,14 @@
       </p:sp>
       <p:sp>
         <p:nvSpPr>
-          <p:cNvPr id="19" name="TextBox 18"/>
+          <p:cNvPr id="21" name="TextBox 20"/>
           <p:cNvSpPr txBox="1"/>
           <p:nvPr/>
         </p:nvSpPr>
         <p:spPr>
           <a:xfrm>
-            <a:off x="1740000" y="3580000"/>
-            <a:ext cx="4020000" cy="440000"/>
+            <a:off x="8296000" y="2170000"/>
+            <a:ext cx="3220000" cy="420000"/>
           </a:xfrm>
           <a:prstGeom prst="rect">
             <a:avLst/>
@@ -17476,14 +17503,56 @@
           <a:p>
             <a:pPr algn="l">
               <a:lnSpc>
-                <a:spcPct val="115000"/>
-              </a:lnSpc>
-              <a:spcAft>
-                <a:spcPts val="600"/>
-              </a:spcAft>
-            </a:pPr>
-            <a:r>
-              <a:rPr sz="1100" b="0">
+                <a:spcPct val="110000"/>
+              </a:lnSpc>
+              <a:spcAft>
+                <a:spcPts val="600"/>
+              </a:spcAft>
+            </a:pPr>
+            <a:r>
+              <a:rPr sz="1700" b="1">
+                <a:solidFill>
+                  <a:srgbClr val="010328"/>
+                </a:solidFill>
+                <a:latin typeface="微软雅黑"/>
+              </a:rPr>
+              <a:t>课程目标</a:t>
+            </a:r>
+          </a:p>
+        </p:txBody>
+      </p:sp>
+      <p:sp>
+        <p:nvSpPr>
+          <p:cNvPr id="22" name="TextBox 21"/>
+          <p:cNvSpPr txBox="1"/>
+          <p:nvPr/>
+        </p:nvSpPr>
+        <p:spPr>
+          <a:xfrm>
+            <a:off x="8296000" y="2600000"/>
+            <a:ext cx="3220000" cy="540000"/>
+          </a:xfrm>
+          <a:prstGeom prst="rect">
+            <a:avLst/>
+          </a:prstGeom>
+          <a:noFill/>
+        </p:spPr>
+        <p:txBody>
+          <a:bodyPr wrap="square" anchor="t">
+            <a:spAutoFit/>
+          </a:bodyPr>
+          <a:lstStyle/>
+          <a:p>
+            <a:pPr algn="l">
+              <a:lnSpc>
+                <a:spcPct val="118000"/>
+              </a:lnSpc>
+              <a:spcAft>
+                <a:spcPts val="600"/>
+              </a:spcAft>
+            </a:pPr>
+            <a:r>
+              <a:rPr sz="1150" b="0">
                 <a:solidFill>
                   <a:srgbClr val="44546A"/>
                 </a:solidFill>
@@ -17496,14 +17565,14 @@
       </p:sp>
       <p:sp>
         <p:nvSpPr>
-          <p:cNvPr id="20" name="Rectangle 19"/>
+          <p:cNvPr id="23" name="Rectangle 22"/>
           <p:cNvSpPr/>
           <p:nvPr/>
         </p:nvSpPr>
         <p:spPr>
           <a:xfrm>
-            <a:off x="6270000" y="2930000"/>
-            <a:ext cx="5150000" cy="1150000"/>
+            <a:off x="536000" y="3420000"/>
+            <a:ext cx="3520000" cy="1500000"/>
           </a:xfrm>
           <a:prstGeom prst="rect">
             <a:avLst/>
@@ -17542,14 +17611,14 @@
       </p:sp>
       <p:sp>
         <p:nvSpPr>
-          <p:cNvPr id="21" name="Rectangle 20"/>
+          <p:cNvPr id="24" name="Rectangle 23"/>
           <p:cNvSpPr/>
           <p:nvPr/>
         </p:nvSpPr>
         <p:spPr>
           <a:xfrm>
-            <a:off x="6270000" y="2930000"/>
-            <a:ext cx="820000" cy="1150000"/>
+            <a:off x="536000" y="3420000"/>
+            <a:ext cx="3520000" cy="380000"/>
           </a:xfrm>
           <a:prstGeom prst="rect">
             <a:avLst/>
@@ -17586,14 +17655,14 @@
       </p:sp>
       <p:sp>
         <p:nvSpPr>
-          <p:cNvPr id="22" name="TextBox 21"/>
+          <p:cNvPr id="25" name="TextBox 24"/>
           <p:cNvSpPr txBox="1"/>
           <p:nvPr/>
         </p:nvSpPr>
         <p:spPr>
           <a:xfrm>
-            <a:off x="6270000" y="3220000"/>
-            <a:ext cx="820000" cy="560000"/>
+            <a:off x="696000" y="3460000"/>
+            <a:ext cx="1300000" cy="320000"/>
           </a:xfrm>
           <a:prstGeom prst="rect">
             <a:avLst/>
@@ -17606,7 +17675,7 @@
           </a:bodyPr>
           <a:lstStyle/>
           <a:p>
-            <a:pPr algn="ctr">
+            <a:pPr algn="l">
               <a:lnSpc>
                 <a:spcPct val="110000"/>
               </a:lnSpc>
@@ -17615,7 +17684,7 @@
               </a:spcAft>
             </a:pPr>
             <a:r>
-              <a:rPr sz="2200" b="1">
+              <a:rPr sz="2400" b="1">
                 <a:solidFill>
                   <a:srgbClr val="FFFFFF"/>
                 </a:solidFill>
@@ -17628,14 +17697,14 @@
       </p:sp>
       <p:sp>
         <p:nvSpPr>
-          <p:cNvPr id="23" name="TextBox 22"/>
+          <p:cNvPr id="26" name="TextBox 25"/>
           <p:cNvSpPr txBox="1"/>
           <p:nvPr/>
         </p:nvSpPr>
         <p:spPr>
           <a:xfrm>
-            <a:off x="7250000" y="3010000"/>
-            <a:ext cx="4020000" cy="500000"/>
+            <a:off x="2036000" y="3500000"/>
+            <a:ext cx="1900000" cy="280000"/>
           </a:xfrm>
           <a:prstGeom prst="rect">
             <a:avLst/>
@@ -17648,7 +17717,7 @@
           </a:bodyPr>
           <a:lstStyle/>
           <a:p>
-            <a:pPr algn="l">
+            <a:pPr algn="r">
               <a:lnSpc>
                 <a:spcPct val="110000"/>
               </a:lnSpc>
@@ -17657,28 +17726,9 @@
               </a:spcAft>
             </a:pPr>
             <a:r>
-              <a:rPr sz="1550" b="1">
-                <a:solidFill>
-                  <a:srgbClr val="010328"/>
-                </a:solidFill>
-                <a:latin typeface="微软雅黑"/>
-              </a:rPr>
-              <a:t>内容与结构</a:t>
-            </a:r>
-          </a:p>
-          <a:p>
-            <a:pPr algn="l">
-              <a:lnSpc>
-                <a:spcPct val="110000"/>
-              </a:lnSpc>
-              <a:spcAft>
-                <a:spcPts val="600"/>
-              </a:spcAft>
-            </a:pPr>
-            <a:r>
-              <a:rPr sz="1150" b="1">
-                <a:solidFill>
-                  <a:srgbClr val="0545E8"/>
+              <a:rPr sz="1200" b="1">
+                <a:solidFill>
+                  <a:srgbClr val="FFFFFF"/>
                 </a:solidFill>
                 <a:latin typeface="微软雅黑"/>
               </a:rPr>
@@ -17689,14 +17739,14 @@
       </p:sp>
       <p:sp>
         <p:nvSpPr>
-          <p:cNvPr id="24" name="TextBox 23"/>
+          <p:cNvPr id="27" name="TextBox 26"/>
           <p:cNvSpPr txBox="1"/>
           <p:nvPr/>
         </p:nvSpPr>
         <p:spPr>
           <a:xfrm>
-            <a:off x="7250000" y="3580000"/>
-            <a:ext cx="4020000" cy="440000"/>
+            <a:off x="696000" y="3870000"/>
+            <a:ext cx="3220000" cy="420000"/>
           </a:xfrm>
           <a:prstGeom prst="rect">
             <a:avLst/>
@@ -17711,14 +17761,56 @@
           <a:p>
             <a:pPr algn="l">
               <a:lnSpc>
-                <a:spcPct val="115000"/>
-              </a:lnSpc>
-              <a:spcAft>
-                <a:spcPts val="600"/>
-              </a:spcAft>
-            </a:pPr>
-            <a:r>
-              <a:rPr sz="1100" b="0">
+                <a:spcPct val="110000"/>
+              </a:lnSpc>
+              <a:spcAft>
+                <a:spcPts val="600"/>
+              </a:spcAft>
+            </a:pPr>
+            <a:r>
+              <a:rPr sz="1700" b="1">
+                <a:solidFill>
+                  <a:srgbClr val="010328"/>
+                </a:solidFill>
+                <a:latin typeface="微软雅黑"/>
+              </a:rPr>
+              <a:t>内容与结构</a:t>
+            </a:r>
+          </a:p>
+        </p:txBody>
+      </p:sp>
+      <p:sp>
+        <p:nvSpPr>
+          <p:cNvPr id="28" name="TextBox 27"/>
+          <p:cNvSpPr txBox="1"/>
+          <p:nvPr/>
+        </p:nvSpPr>
+        <p:spPr>
+          <a:xfrm>
+            <a:off x="696000" y="4300000"/>
+            <a:ext cx="3220000" cy="540000"/>
+          </a:xfrm>
+          <a:prstGeom prst="rect">
+            <a:avLst/>
+          </a:prstGeom>
+          <a:noFill/>
+        </p:spPr>
+        <p:txBody>
+          <a:bodyPr wrap="square" anchor="t">
+            <a:spAutoFit/>
+          </a:bodyPr>
+          <a:lstStyle/>
+          <a:p>
+            <a:pPr algn="l">
+              <a:lnSpc>
+                <a:spcPct val="118000"/>
+              </a:lnSpc>
+              <a:spcAft>
+                <a:spcPts val="600"/>
+              </a:spcAft>
+            </a:pPr>
+            <a:r>
+              <a:rPr sz="1150" b="0">
                 <a:solidFill>
                   <a:srgbClr val="44546A"/>
                 </a:solidFill>
@@ -17731,14 +17823,14 @@
       </p:sp>
       <p:sp>
         <p:nvSpPr>
-          <p:cNvPr id="25" name="Rectangle 24"/>
+          <p:cNvPr id="29" name="Rectangle 28"/>
           <p:cNvSpPr/>
           <p:nvPr/>
         </p:nvSpPr>
         <p:spPr>
           <a:xfrm>
-            <a:off x="760000" y="4260000"/>
-            <a:ext cx="5150000" cy="1150000"/>
+            <a:off x="4336000" y="3420000"/>
+            <a:ext cx="3520000" cy="1500000"/>
           </a:xfrm>
           <a:prstGeom prst="rect">
             <a:avLst/>
@@ -17777,14 +17869,14 @@
       </p:sp>
       <p:sp>
         <p:nvSpPr>
-          <p:cNvPr id="26" name="Rectangle 25"/>
+          <p:cNvPr id="30" name="Rectangle 29"/>
           <p:cNvSpPr/>
           <p:nvPr/>
         </p:nvSpPr>
         <p:spPr>
           <a:xfrm>
-            <a:off x="760000" y="4260000"/>
-            <a:ext cx="820000" cy="1150000"/>
+            <a:off x="4336000" y="3420000"/>
+            <a:ext cx="3520000" cy="380000"/>
           </a:xfrm>
           <a:prstGeom prst="rect">
             <a:avLst/>
@@ -17821,14 +17913,14 @@
       </p:sp>
       <p:sp>
         <p:nvSpPr>
-          <p:cNvPr id="27" name="TextBox 26"/>
+          <p:cNvPr id="31" name="TextBox 30"/>
           <p:cNvSpPr txBox="1"/>
           <p:nvPr/>
         </p:nvSpPr>
         <p:spPr>
           <a:xfrm>
-            <a:off x="760000" y="4550000"/>
-            <a:ext cx="820000" cy="560000"/>
+            <a:off x="4496000" y="3460000"/>
+            <a:ext cx="1300000" cy="320000"/>
           </a:xfrm>
           <a:prstGeom prst="rect">
             <a:avLst/>
@@ -17841,7 +17933,7 @@
           </a:bodyPr>
           <a:lstStyle/>
           <a:p>
-            <a:pPr algn="ctr">
+            <a:pPr algn="l">
               <a:lnSpc>
                 <a:spcPct val="110000"/>
               </a:lnSpc>
@@ -17850,7 +17942,7 @@
               </a:spcAft>
             </a:pPr>
             <a:r>
-              <a:rPr sz="2200" b="1">
+              <a:rPr sz="2400" b="1">
                 <a:solidFill>
                   <a:srgbClr val="FFFFFF"/>
                 </a:solidFill>
@@ -17863,14 +17955,14 @@
       </p:sp>
       <p:sp>
         <p:nvSpPr>
-          <p:cNvPr id="28" name="TextBox 27"/>
+          <p:cNvPr id="32" name="TextBox 31"/>
           <p:cNvSpPr txBox="1"/>
           <p:nvPr/>
         </p:nvSpPr>
         <p:spPr>
           <a:xfrm>
-            <a:off x="1740000" y="4340000"/>
-            <a:ext cx="4020000" cy="500000"/>
+            <a:off x="5836000" y="3500000"/>
+            <a:ext cx="1900000" cy="280000"/>
           </a:xfrm>
           <a:prstGeom prst="rect">
             <a:avLst/>
@@ -17883,7 +17975,7 @@
           </a:bodyPr>
           <a:lstStyle/>
           <a:p>
-            <a:pPr algn="l">
+            <a:pPr algn="r">
               <a:lnSpc>
                 <a:spcPct val="110000"/>
               </a:lnSpc>
@@ -17892,28 +17984,9 @@
               </a:spcAft>
             </a:pPr>
             <a:r>
-              <a:rPr sz="1550" b="1">
-                <a:solidFill>
-                  <a:srgbClr val="010328"/>
-                </a:solidFill>
-                <a:latin typeface="微软雅黑"/>
-              </a:rPr>
-              <a:t>教学设计</a:t>
-            </a:r>
-          </a:p>
-          <a:p>
-            <a:pPr algn="l">
-              <a:lnSpc>
-                <a:spcPct val="110000"/>
-              </a:lnSpc>
-              <a:spcAft>
-                <a:spcPts val="600"/>
-              </a:spcAft>
-            </a:pPr>
-            <a:r>
-              <a:rPr sz="1150" b="1">
-                <a:solidFill>
-                  <a:srgbClr val="0545E8"/>
+              <a:rPr sz="1200" b="1">
+                <a:solidFill>
+                  <a:srgbClr val="FFFFFF"/>
                 </a:solidFill>
                 <a:latin typeface="微软雅黑"/>
               </a:rPr>
@@ -17924,14 +17997,14 @@
       </p:sp>
       <p:sp>
         <p:nvSpPr>
-          <p:cNvPr id="29" name="TextBox 28"/>
+          <p:cNvPr id="33" name="TextBox 32"/>
           <p:cNvSpPr txBox="1"/>
           <p:nvPr/>
         </p:nvSpPr>
         <p:spPr>
           <a:xfrm>
-            <a:off x="1740000" y="4910000"/>
-            <a:ext cx="4020000" cy="440000"/>
+            <a:off x="4496000" y="3870000"/>
+            <a:ext cx="3220000" cy="420000"/>
           </a:xfrm>
           <a:prstGeom prst="rect">
             <a:avLst/>
@@ -17946,14 +18019,56 @@
           <a:p>
             <a:pPr algn="l">
               <a:lnSpc>
-                <a:spcPct val="115000"/>
-              </a:lnSpc>
-              <a:spcAft>
-                <a:spcPts val="600"/>
-              </a:spcAft>
-            </a:pPr>
-            <a:r>
-              <a:rPr sz="1100" b="0">
+                <a:spcPct val="110000"/>
+              </a:lnSpc>
+              <a:spcAft>
+                <a:spcPts val="600"/>
+              </a:spcAft>
+            </a:pPr>
+            <a:r>
+              <a:rPr sz="1700" b="1">
+                <a:solidFill>
+                  <a:srgbClr val="010328"/>
+                </a:solidFill>
+                <a:latin typeface="微软雅黑"/>
+              </a:rPr>
+              <a:t>教学设计</a:t>
+            </a:r>
+          </a:p>
+        </p:txBody>
+      </p:sp>
+      <p:sp>
+        <p:nvSpPr>
+          <p:cNvPr id="34" name="TextBox 33"/>
+          <p:cNvSpPr txBox="1"/>
+          <p:nvPr/>
+        </p:nvSpPr>
+        <p:spPr>
+          <a:xfrm>
+            <a:off x="4496000" y="4300000"/>
+            <a:ext cx="3220000" cy="540000"/>
+          </a:xfrm>
+          <a:prstGeom prst="rect">
+            <a:avLst/>
+          </a:prstGeom>
+          <a:noFill/>
+        </p:spPr>
+        <p:txBody>
+          <a:bodyPr wrap="square" anchor="t">
+            <a:spAutoFit/>
+          </a:bodyPr>
+          <a:lstStyle/>
+          <a:p>
+            <a:pPr algn="l">
+              <a:lnSpc>
+                <a:spcPct val="118000"/>
+              </a:lnSpc>
+              <a:spcAft>
+                <a:spcPts val="600"/>
+              </a:spcAft>
+            </a:pPr>
+            <a:r>
+              <a:rPr sz="1150" b="0">
                 <a:solidFill>
                   <a:srgbClr val="44546A"/>
                 </a:solidFill>
@@ -17966,14 +18081,14 @@
       </p:sp>
       <p:sp>
         <p:nvSpPr>
-          <p:cNvPr id="30" name="Rectangle 29"/>
+          <p:cNvPr id="35" name="Rectangle 34"/>
           <p:cNvSpPr/>
           <p:nvPr/>
         </p:nvSpPr>
         <p:spPr>
           <a:xfrm>
-            <a:off x="6270000" y="4260000"/>
-            <a:ext cx="5150000" cy="1150000"/>
+            <a:off x="8136000" y="3420000"/>
+            <a:ext cx="3520000" cy="1500000"/>
           </a:xfrm>
           <a:prstGeom prst="rect">
             <a:avLst/>
@@ -18012,14 +18127,14 @@
       </p:sp>
       <p:sp>
         <p:nvSpPr>
-          <p:cNvPr id="31" name="Rectangle 30"/>
+          <p:cNvPr id="36" name="Rectangle 35"/>
           <p:cNvSpPr/>
           <p:nvPr/>
         </p:nvSpPr>
         <p:spPr>
           <a:xfrm>
-            <a:off x="6270000" y="4260000"/>
-            <a:ext cx="820000" cy="1150000"/>
+            <a:off x="8136000" y="3420000"/>
+            <a:ext cx="3520000" cy="380000"/>
           </a:xfrm>
           <a:prstGeom prst="rect">
             <a:avLst/>
@@ -18056,14 +18171,14 @@
       </p:sp>
       <p:sp>
         <p:nvSpPr>
-          <p:cNvPr id="32" name="TextBox 31"/>
+          <p:cNvPr id="37" name="TextBox 36"/>
           <p:cNvSpPr txBox="1"/>
           <p:nvPr/>
         </p:nvSpPr>
         <p:spPr>
           <a:xfrm>
-            <a:off x="6270000" y="4550000"/>
-            <a:ext cx="820000" cy="560000"/>
+            <a:off x="8296000" y="3460000"/>
+            <a:ext cx="1300000" cy="320000"/>
           </a:xfrm>
           <a:prstGeom prst="rect">
             <a:avLst/>
@@ -18076,7 +18191,7 @@
           </a:bodyPr>
           <a:lstStyle/>
           <a:p>
-            <a:pPr algn="ctr">
+            <a:pPr algn="l">
               <a:lnSpc>
                 <a:spcPct val="110000"/>
               </a:lnSpc>
@@ -18085,7 +18200,7 @@
               </a:spcAft>
             </a:pPr>
             <a:r>
-              <a:rPr sz="2200" b="1">
+              <a:rPr sz="2400" b="1">
                 <a:solidFill>
                   <a:srgbClr val="FFFFFF"/>
                 </a:solidFill>
@@ -18098,14 +18213,14 @@
       </p:sp>
       <p:sp>
         <p:nvSpPr>
-          <p:cNvPr id="33" name="TextBox 32"/>
+          <p:cNvPr id="38" name="TextBox 37"/>
           <p:cNvSpPr txBox="1"/>
           <p:nvPr/>
         </p:nvSpPr>
         <p:spPr>
           <a:xfrm>
-            <a:off x="7250000" y="4340000"/>
-            <a:ext cx="4020000" cy="500000"/>
+            <a:off x="9636000" y="3500000"/>
+            <a:ext cx="1900000" cy="280000"/>
           </a:xfrm>
           <a:prstGeom prst="rect">
             <a:avLst/>
@@ -18118,7 +18233,7 @@
           </a:bodyPr>
           <a:lstStyle/>
           <a:p>
-            <a:pPr algn="l">
+            <a:pPr algn="r">
               <a:lnSpc>
                 <a:spcPct val="110000"/>
               </a:lnSpc>
@@ -18127,28 +18242,9 @@
               </a:spcAft>
             </a:pPr>
             <a:r>
-              <a:rPr sz="1550" b="1">
-                <a:solidFill>
-                  <a:srgbClr val="010328"/>
-                </a:solidFill>
-                <a:latin typeface="微软雅黑"/>
-              </a:rPr>
-              <a:t>教学资源</a:t>
-            </a:r>
-          </a:p>
-          <a:p>
-            <a:pPr algn="l">
-              <a:lnSpc>
-                <a:spcPct val="110000"/>
-              </a:lnSpc>
-              <a:spcAft>
-                <a:spcPts val="600"/>
-              </a:spcAft>
-            </a:pPr>
-            <a:r>
-              <a:rPr sz="1150" b="1">
-                <a:solidFill>
-                  <a:srgbClr val="0545E8"/>
+              <a:rPr sz="1200" b="1">
+                <a:solidFill>
+                  <a:srgbClr val="FFFFFF"/>
                 </a:solidFill>
                 <a:latin typeface="微软雅黑"/>
               </a:rPr>
@@ -18159,14 +18255,14 @@
       </p:sp>
       <p:sp>
         <p:nvSpPr>
-          <p:cNvPr id="34" name="TextBox 33"/>
+          <p:cNvPr id="39" name="TextBox 38"/>
           <p:cNvSpPr txBox="1"/>
           <p:nvPr/>
         </p:nvSpPr>
         <p:spPr>
           <a:xfrm>
-            <a:off x="7250000" y="4910000"/>
-            <a:ext cx="4020000" cy="440000"/>
+            <a:off x="8296000" y="3870000"/>
+            <a:ext cx="3220000" cy="420000"/>
           </a:xfrm>
           <a:prstGeom prst="rect">
             <a:avLst/>
@@ -18181,14 +18277,56 @@
           <a:p>
             <a:pPr algn="l">
               <a:lnSpc>
-                <a:spcPct val="115000"/>
-              </a:lnSpc>
-              <a:spcAft>
-                <a:spcPts val="600"/>
-              </a:spcAft>
-            </a:pPr>
-            <a:r>
-              <a:rPr sz="1100" b="0">
+                <a:spcPct val="110000"/>
+              </a:lnSpc>
+              <a:spcAft>
+                <a:spcPts val="600"/>
+              </a:spcAft>
+            </a:pPr>
+            <a:r>
+              <a:rPr sz="1700" b="1">
+                <a:solidFill>
+                  <a:srgbClr val="010328"/>
+                </a:solidFill>
+                <a:latin typeface="微软雅黑"/>
+              </a:rPr>
+              <a:t>教学资源</a:t>
+            </a:r>
+          </a:p>
+        </p:txBody>
+      </p:sp>
+      <p:sp>
+        <p:nvSpPr>
+          <p:cNvPr id="40" name="TextBox 39"/>
+          <p:cNvSpPr txBox="1"/>
+          <p:nvPr/>
+        </p:nvSpPr>
+        <p:spPr>
+          <a:xfrm>
+            <a:off x="8296000" y="4300000"/>
+            <a:ext cx="3220000" cy="540000"/>
+          </a:xfrm>
+          <a:prstGeom prst="rect">
+            <a:avLst/>
+          </a:prstGeom>
+          <a:noFill/>
+        </p:spPr>
+        <p:txBody>
+          <a:bodyPr wrap="square" anchor="t">
+            <a:spAutoFit/>
+          </a:bodyPr>
+          <a:lstStyle/>
+          <a:p>
+            <a:pPr algn="l">
+              <a:lnSpc>
+                <a:spcPct val="118000"/>
+              </a:lnSpc>
+              <a:spcAft>
+                <a:spcPts val="600"/>
+              </a:spcAft>
+            </a:pPr>
+            <a:r>
+              <a:rPr sz="1150" b="0">
                 <a:solidFill>
                   <a:srgbClr val="44546A"/>
                 </a:solidFill>
@@ -18201,14 +18339,14 @@
       </p:sp>
       <p:sp>
         <p:nvSpPr>
-          <p:cNvPr id="35" name="Rectangle 34"/>
+          <p:cNvPr id="41" name="Rectangle 40"/>
           <p:cNvSpPr/>
           <p:nvPr/>
         </p:nvSpPr>
         <p:spPr>
           <a:xfrm>
-            <a:off x="760000" y="5590000"/>
-            <a:ext cx="5150000" cy="1150000"/>
+            <a:off x="536000" y="5120000"/>
+            <a:ext cx="3520000" cy="1500000"/>
           </a:xfrm>
           <a:prstGeom prst="rect">
             <a:avLst/>
@@ -18247,14 +18385,14 @@
       </p:sp>
       <p:sp>
         <p:nvSpPr>
-          <p:cNvPr id="36" name="Rectangle 35"/>
+          <p:cNvPr id="42" name="Rectangle 41"/>
           <p:cNvSpPr/>
           <p:nvPr/>
         </p:nvSpPr>
         <p:spPr>
           <a:xfrm>
-            <a:off x="760000" y="5590000"/>
-            <a:ext cx="820000" cy="1150000"/>
+            <a:off x="536000" y="5120000"/>
+            <a:ext cx="3520000" cy="380000"/>
           </a:xfrm>
           <a:prstGeom prst="rect">
             <a:avLst/>
@@ -18291,14 +18429,14 @@
       </p:sp>
       <p:sp>
         <p:nvSpPr>
-          <p:cNvPr id="37" name="TextBox 36"/>
+          <p:cNvPr id="43" name="TextBox 42"/>
           <p:cNvSpPr txBox="1"/>
           <p:nvPr/>
         </p:nvSpPr>
         <p:spPr>
           <a:xfrm>
-            <a:off x="760000" y="5880000"/>
-            <a:ext cx="820000" cy="560000"/>
+            <a:off x="696000" y="5160000"/>
+            <a:ext cx="1300000" cy="320000"/>
           </a:xfrm>
           <a:prstGeom prst="rect">
             <a:avLst/>
@@ -18311,7 +18449,7 @@
           </a:bodyPr>
           <a:lstStyle/>
           <a:p>
-            <a:pPr algn="ctr">
+            <a:pPr algn="l">
               <a:lnSpc>
                 <a:spcPct val="110000"/>
               </a:lnSpc>
@@ -18320,7 +18458,7 @@
               </a:spcAft>
             </a:pPr>
             <a:r>
-              <a:rPr sz="2200" b="1">
+              <a:rPr sz="2400" b="1">
                 <a:solidFill>
                   <a:srgbClr val="FFFFFF"/>
                 </a:solidFill>
@@ -18333,14 +18471,14 @@
       </p:sp>
       <p:sp>
         <p:nvSpPr>
-          <p:cNvPr id="38" name="TextBox 37"/>
+          <p:cNvPr id="44" name="TextBox 43"/>
           <p:cNvSpPr txBox="1"/>
           <p:nvPr/>
         </p:nvSpPr>
         <p:spPr>
           <a:xfrm>
-            <a:off x="1740000" y="5670000"/>
-            <a:ext cx="4020000" cy="500000"/>
+            <a:off x="2036000" y="5200000"/>
+            <a:ext cx="1900000" cy="280000"/>
           </a:xfrm>
           <a:prstGeom prst="rect">
             <a:avLst/>
@@ -18353,7 +18491,7 @@
           </a:bodyPr>
           <a:lstStyle/>
           <a:p>
-            <a:pPr algn="l">
+            <a:pPr algn="r">
               <a:lnSpc>
                 <a:spcPct val="110000"/>
               </a:lnSpc>
@@ -18362,28 +18500,9 @@
               </a:spcAft>
             </a:pPr>
             <a:r>
-              <a:rPr sz="1550" b="1">
-                <a:solidFill>
-                  <a:srgbClr val="010328"/>
-                </a:solidFill>
-                <a:latin typeface="微软雅黑"/>
-              </a:rPr>
-              <a:t>考核评价</a:t>
-            </a:r>
-          </a:p>
-          <a:p>
-            <a:pPr algn="l">
-              <a:lnSpc>
-                <a:spcPct val="110000"/>
-              </a:lnSpc>
-              <a:spcAft>
-                <a:spcPts val="600"/>
-              </a:spcAft>
-            </a:pPr>
-            <a:r>
-              <a:rPr sz="1150" b="1">
-                <a:solidFill>
-                  <a:srgbClr val="0545E8"/>
+              <a:rPr sz="1200" b="1">
+                <a:solidFill>
+                  <a:srgbClr val="FFFFFF"/>
                 </a:solidFill>
                 <a:latin typeface="微软雅黑"/>
               </a:rPr>
@@ -18394,14 +18513,14 @@
       </p:sp>
       <p:sp>
         <p:nvSpPr>
-          <p:cNvPr id="39" name="TextBox 38"/>
+          <p:cNvPr id="45" name="TextBox 44"/>
           <p:cNvSpPr txBox="1"/>
           <p:nvPr/>
         </p:nvSpPr>
         <p:spPr>
           <a:xfrm>
-            <a:off x="1740000" y="6240000"/>
-            <a:ext cx="4020000" cy="440000"/>
+            <a:off x="696000" y="5570000"/>
+            <a:ext cx="3220000" cy="420000"/>
           </a:xfrm>
           <a:prstGeom prst="rect">
             <a:avLst/>
@@ -18416,14 +18535,56 @@
           <a:p>
             <a:pPr algn="l">
               <a:lnSpc>
-                <a:spcPct val="115000"/>
-              </a:lnSpc>
-              <a:spcAft>
-                <a:spcPts val="600"/>
-              </a:spcAft>
-            </a:pPr>
-            <a:r>
-              <a:rPr sz="1100" b="0">
+                <a:spcPct val="110000"/>
+              </a:lnSpc>
+              <a:spcAft>
+                <a:spcPts val="600"/>
+              </a:spcAft>
+            </a:pPr>
+            <a:r>
+              <a:rPr sz="1700" b="1">
+                <a:solidFill>
+                  <a:srgbClr val="010328"/>
+                </a:solidFill>
+                <a:latin typeface="微软雅黑"/>
+              </a:rPr>
+              <a:t>考核评价</a:t>
+            </a:r>
+          </a:p>
+        </p:txBody>
+      </p:sp>
+      <p:sp>
+        <p:nvSpPr>
+          <p:cNvPr id="46" name="TextBox 45"/>
+          <p:cNvSpPr txBox="1"/>
+          <p:nvPr/>
+        </p:nvSpPr>
+        <p:spPr>
+          <a:xfrm>
+            <a:off x="696000" y="6000000"/>
+            <a:ext cx="3220000" cy="540000"/>
+          </a:xfrm>
+          <a:prstGeom prst="rect">
+            <a:avLst/>
+          </a:prstGeom>
+          <a:noFill/>
+        </p:spPr>
+        <p:txBody>
+          <a:bodyPr wrap="square" anchor="t">
+            <a:spAutoFit/>
+          </a:bodyPr>
+          <a:lstStyle/>
+          <a:p>
+            <a:pPr algn="l">
+              <a:lnSpc>
+                <a:spcPct val="118000"/>
+              </a:lnSpc>
+              <a:spcAft>
+                <a:spcPts val="600"/>
+              </a:spcAft>
+            </a:pPr>
+            <a:r>
+              <a:rPr sz="1150" b="0">
                 <a:solidFill>
                   <a:srgbClr val="44546A"/>
                 </a:solidFill>
@@ -18436,14 +18597,14 @@
       </p:sp>
       <p:sp>
         <p:nvSpPr>
-          <p:cNvPr id="40" name="Rectangle 39"/>
+          <p:cNvPr id="47" name="Rectangle 46"/>
           <p:cNvSpPr/>
           <p:nvPr/>
         </p:nvSpPr>
         <p:spPr>
           <a:xfrm>
-            <a:off x="6270000" y="5590000"/>
-            <a:ext cx="5150000" cy="1150000"/>
+            <a:off x="4336000" y="5120000"/>
+            <a:ext cx="3520000" cy="1500000"/>
           </a:xfrm>
           <a:prstGeom prst="rect">
             <a:avLst/>
@@ -18482,14 +18643,14 @@
       </p:sp>
       <p:sp>
         <p:nvSpPr>
-          <p:cNvPr id="41" name="Rectangle 40"/>
+          <p:cNvPr id="48" name="Rectangle 47"/>
           <p:cNvSpPr/>
           <p:nvPr/>
         </p:nvSpPr>
         <p:spPr>
           <a:xfrm>
-            <a:off x="6270000" y="5590000"/>
-            <a:ext cx="820000" cy="1150000"/>
+            <a:off x="4336000" y="5120000"/>
+            <a:ext cx="3520000" cy="380000"/>
           </a:xfrm>
           <a:prstGeom prst="rect">
             <a:avLst/>
@@ -18526,14 +18687,14 @@
       </p:sp>
       <p:sp>
         <p:nvSpPr>
-          <p:cNvPr id="42" name="TextBox 41"/>
+          <p:cNvPr id="49" name="TextBox 48"/>
           <p:cNvSpPr txBox="1"/>
           <p:nvPr/>
         </p:nvSpPr>
         <p:spPr>
           <a:xfrm>
-            <a:off x="6270000" y="5880000"/>
-            <a:ext cx="820000" cy="560000"/>
+            <a:off x="4496000" y="5160000"/>
+            <a:ext cx="1300000" cy="320000"/>
           </a:xfrm>
           <a:prstGeom prst="rect">
             <a:avLst/>
@@ -18546,7 +18707,7 @@
           </a:bodyPr>
           <a:lstStyle/>
           <a:p>
-            <a:pPr algn="ctr">
+            <a:pPr algn="l">
               <a:lnSpc>
                 <a:spcPct val="110000"/>
               </a:lnSpc>
@@ -18555,7 +18716,7 @@
               </a:spcAft>
             </a:pPr>
             <a:r>
-              <a:rPr sz="2200" b="1">
+              <a:rPr sz="2400" b="1">
                 <a:solidFill>
                   <a:srgbClr val="FFFFFF"/>
                 </a:solidFill>
@@ -18568,14 +18729,14 @@
       </p:sp>
       <p:sp>
         <p:nvSpPr>
-          <p:cNvPr id="43" name="TextBox 42"/>
+          <p:cNvPr id="50" name="TextBox 49"/>
           <p:cNvSpPr txBox="1"/>
           <p:nvPr/>
         </p:nvSpPr>
         <p:spPr>
           <a:xfrm>
-            <a:off x="7250000" y="5670000"/>
-            <a:ext cx="4020000" cy="500000"/>
+            <a:off x="5836000" y="5200000"/>
+            <a:ext cx="1900000" cy="280000"/>
           </a:xfrm>
           <a:prstGeom prst="rect">
             <a:avLst/>
@@ -18588,7 +18749,7 @@
           </a:bodyPr>
           <a:lstStyle/>
           <a:p>
-            <a:pPr algn="l">
+            <a:pPr algn="r">
               <a:lnSpc>
                 <a:spcPct val="110000"/>
               </a:lnSpc>
@@ -18597,28 +18758,9 @@
               </a:spcAft>
             </a:pPr>
             <a:r>
-              <a:rPr sz="1550" b="1">
-                <a:solidFill>
-                  <a:srgbClr val="010328"/>
-                </a:solidFill>
-                <a:latin typeface="微软雅黑"/>
-              </a:rPr>
-              <a:t>特色与成效</a:t>
-            </a:r>
-          </a:p>
-          <a:p>
-            <a:pPr algn="l">
-              <a:lnSpc>
-                <a:spcPct val="110000"/>
-              </a:lnSpc>
-              <a:spcAft>
-                <a:spcPts val="600"/>
-              </a:spcAft>
-            </a:pPr>
-            <a:r>
-              <a:rPr sz="1150" b="1">
-                <a:solidFill>
-                  <a:srgbClr val="0545E8"/>
+              <a:rPr sz="1200" b="1">
+                <a:solidFill>
+                  <a:srgbClr val="FFFFFF"/>
                 </a:solidFill>
                 <a:latin typeface="微软雅黑"/>
               </a:rPr>
@@ -18629,14 +18771,14 @@
       </p:sp>
       <p:sp>
         <p:nvSpPr>
-          <p:cNvPr id="44" name="TextBox 43"/>
+          <p:cNvPr id="51" name="TextBox 50"/>
           <p:cNvSpPr txBox="1"/>
           <p:nvPr/>
         </p:nvSpPr>
         <p:spPr>
           <a:xfrm>
-            <a:off x="7250000" y="6240000"/>
-            <a:ext cx="4020000" cy="440000"/>
+            <a:off x="4496000" y="5570000"/>
+            <a:ext cx="3220000" cy="420000"/>
           </a:xfrm>
           <a:prstGeom prst="rect">
             <a:avLst/>
@@ -18651,14 +18793,56 @@
           <a:p>
             <a:pPr algn="l">
               <a:lnSpc>
-                <a:spcPct val="115000"/>
-              </a:lnSpc>
-              <a:spcAft>
-                <a:spcPts val="600"/>
-              </a:spcAft>
-            </a:pPr>
-            <a:r>
-              <a:rPr sz="1100" b="0">
+                <a:spcPct val="110000"/>
+              </a:lnSpc>
+              <a:spcAft>
+                <a:spcPts val="600"/>
+              </a:spcAft>
+            </a:pPr>
+            <a:r>
+              <a:rPr sz="1700" b="1">
+                <a:solidFill>
+                  <a:srgbClr val="010328"/>
+                </a:solidFill>
+                <a:latin typeface="微软雅黑"/>
+              </a:rPr>
+              <a:t>特色与成效</a:t>
+            </a:r>
+          </a:p>
+        </p:txBody>
+      </p:sp>
+      <p:sp>
+        <p:nvSpPr>
+          <p:cNvPr id="52" name="TextBox 51"/>
+          <p:cNvSpPr txBox="1"/>
+          <p:nvPr/>
+        </p:nvSpPr>
+        <p:spPr>
+          <a:xfrm>
+            <a:off x="4496000" y="6000000"/>
+            <a:ext cx="3220000" cy="540000"/>
+          </a:xfrm>
+          <a:prstGeom prst="rect">
+            <a:avLst/>
+          </a:prstGeom>
+          <a:noFill/>
+        </p:spPr>
+        <p:txBody>
+          <a:bodyPr wrap="square" anchor="t">
+            <a:spAutoFit/>
+          </a:bodyPr>
+          <a:lstStyle/>
+          <a:p>
+            <a:pPr algn="l">
+              <a:lnSpc>
+                <a:spcPct val="118000"/>
+              </a:lnSpc>
+              <a:spcAft>
+                <a:spcPts val="600"/>
+              </a:spcAft>
+            </a:pPr>
+            <a:r>
+              <a:rPr sz="1150" b="0">
                 <a:solidFill>
                   <a:srgbClr val="44546A"/>
                 </a:solidFill>
@@ -18671,7 +18855,154 @@
       </p:sp>
       <p:sp>
         <p:nvSpPr>
-          <p:cNvPr id="45" name="Rectangle 44"/>
+          <p:cNvPr id="53" name="Rectangle 52"/>
+          <p:cNvSpPr/>
+          <p:nvPr/>
+        </p:nvSpPr>
+        <p:spPr>
+          <a:xfrm>
+            <a:off x="8136000" y="5120000"/>
+            <a:ext cx="3520000" cy="1500000"/>
+          </a:xfrm>
+          <a:prstGeom prst="rect">
+            <a:avLst/>
+          </a:prstGeom>
+          <a:solidFill>
+            <a:srgbClr val="010328"/>
+          </a:solidFill>
+          <a:ln>
+            <a:noFill/>
+          </a:ln>
+          <a:effectLst/>
+        </p:spPr>
+        <p:style>
+          <a:lnRef idx="1">
+            <a:schemeClr val="accent1"/>
+          </a:lnRef>
+          <a:fillRef idx="3">
+            <a:schemeClr val="accent1"/>
+          </a:fillRef>
+          <a:effectRef idx="2">
+            <a:schemeClr val="accent1"/>
+          </a:effectRef>
+          <a:fontRef idx="minor">
+            <a:schemeClr val="lt1"/>
+          </a:fontRef>
+        </p:style>
+        <p:txBody>
+          <a:bodyPr rtlCol="0" anchor="ctr"/>
+          <a:lstStyle/>
+          <a:p>
+            <a:pPr algn="ctr"/>
+          </a:p>
+        </p:txBody>
+      </p:sp>
+      <p:sp>
+        <p:nvSpPr>
+          <p:cNvPr id="54" name="TextBox 53"/>
+          <p:cNvSpPr txBox="1"/>
+          <p:nvPr/>
+        </p:nvSpPr>
+        <p:spPr>
+          <a:xfrm>
+            <a:off x="8276000" y="5300000"/>
+            <a:ext cx="3240000" cy="420000"/>
+          </a:xfrm>
+          <a:prstGeom prst="rect">
+            <a:avLst/>
+          </a:prstGeom>
+          <a:noFill/>
+        </p:spPr>
+        <p:txBody>
+          <a:bodyPr wrap="square" anchor="t">
+            <a:spAutoFit/>
+          </a:bodyPr>
+          <a:lstStyle/>
+          <a:p>
+            <a:pPr algn="ctr">
+              <a:lnSpc>
+                <a:spcPct val="110000"/>
+              </a:lnSpc>
+              <a:spcAft>
+                <a:spcPts val="600"/>
+              </a:spcAft>
+            </a:pPr>
+            <a:r>
+              <a:rPr sz="1900" b="1">
+                <a:solidFill>
+                  <a:srgbClr val="FFFFFF"/>
+                </a:solidFill>
+                <a:latin typeface="微软雅黑"/>
+              </a:rPr>
+              <a:t>15分钟 · 八环节</a:t>
+            </a:r>
+          </a:p>
+        </p:txBody>
+      </p:sp>
+      <p:sp>
+        <p:nvSpPr>
+          <p:cNvPr id="55" name="TextBox 54"/>
+          <p:cNvSpPr txBox="1"/>
+          <p:nvPr/>
+        </p:nvSpPr>
+        <p:spPr>
+          <a:xfrm>
+            <a:off x="8276000" y="5760000"/>
+            <a:ext cx="3240000" cy="700000"/>
+          </a:xfrm>
+          <a:prstGeom prst="rect">
+            <a:avLst/>
+          </a:prstGeom>
+          <a:noFill/>
+        </p:spPr>
+        <p:txBody>
+          <a:bodyPr wrap="square" anchor="t">
+            <a:spAutoFit/>
+          </a:bodyPr>
+          <a:lstStyle/>
+          <a:p>
+            <a:pPr algn="ctr">
+              <a:lnSpc>
+                <a:spcPct val="125000"/>
+              </a:lnSpc>
+              <a:spcAft>
+                <a:spcPts val="600"/>
+              </a:spcAft>
+            </a:pPr>
+            <a:r>
+              <a:rPr sz="1150" b="0">
+                <a:solidFill>
+                  <a:srgbClr val="0475B6"/>
+                </a:solidFill>
+                <a:latin typeface="微软雅黑"/>
+              </a:rPr>
+              <a:t>定位→学情→目标→内容→</a:t>
+            </a:r>
+          </a:p>
+          <a:p>
+            <a:pPr algn="ctr">
+              <a:lnSpc>
+                <a:spcPct val="125000"/>
+              </a:lnSpc>
+              <a:spcAft>
+                <a:spcPts val="600"/>
+              </a:spcAft>
+            </a:pPr>
+            <a:r>
+              <a:rPr sz="1150" b="0">
+                <a:solidFill>
+                  <a:srgbClr val="0475B6"/>
+                </a:solidFill>
+                <a:latin typeface="微软雅黑"/>
+              </a:rPr>
+              <a:t>设计→资源→评价→特色成效</a:t>
+            </a:r>
+          </a:p>
+        </p:txBody>
+      </p:sp>
+      <p:sp>
+        <p:nvSpPr>
+          <p:cNvPr id="56" name="Rectangle 55"/>
           <p:cNvSpPr/>
           <p:nvPr/>
         </p:nvSpPr>
@@ -18715,7 +19046,7 @@
       </p:sp>
       <p:sp>
         <p:nvSpPr>
-          <p:cNvPr id="46" name="TextBox 45"/>
+          <p:cNvPr id="57" name="TextBox 56"/>
           <p:cNvSpPr txBox="1"/>
           <p:nvPr/>
         </p:nvSpPr>
@@ -18757,7 +19088,7 @@
       </p:sp>
       <p:sp>
         <p:nvSpPr>
-          <p:cNvPr id="47" name="TextBox 46"/>
+          <p:cNvPr id="58" name="TextBox 57"/>
           <p:cNvSpPr txBox="1"/>
           <p:nvPr/>
         </p:nvSpPr>
@@ -26677,14 +27008,60 @@
         </p:nvSpPr>
         <p:spPr>
           <a:xfrm>
-            <a:off x="760000" y="1750000"/>
-            <a:ext cx="10900000" cy="880000"/>
+            <a:off x="626000" y="1880000"/>
+            <a:ext cx="2100000" cy="4270000"/>
           </a:xfrm>
           <a:prstGeom prst="rect">
             <a:avLst/>
           </a:prstGeom>
           <a:solidFill>
             <a:srgbClr val="F3F6FD"/>
+          </a:solidFill>
+          <a:ln>
+            <a:solidFill>
+              <a:srgbClr val="0545E8"/>
+            </a:solidFill>
+          </a:ln>
+          <a:effectLst/>
+        </p:spPr>
+        <p:style>
+          <a:lnRef idx="1">
+            <a:schemeClr val="accent1"/>
+          </a:lnRef>
+          <a:fillRef idx="3">
+            <a:schemeClr val="accent1"/>
+          </a:fillRef>
+          <a:effectRef idx="2">
+            <a:schemeClr val="accent1"/>
+          </a:effectRef>
+          <a:fontRef idx="minor">
+            <a:schemeClr val="lt1"/>
+          </a:fontRef>
+        </p:style>
+        <p:txBody>
+          <a:bodyPr rtlCol="0" anchor="ctr"/>
+          <a:lstStyle/>
+          <a:p>
+            <a:pPr algn="ctr"/>
+          </a:p>
+        </p:txBody>
+      </p:sp>
+      <p:sp>
+        <p:nvSpPr>
+          <p:cNvPr id="6" name="Rectangle 5"/>
+          <p:cNvSpPr/>
+          <p:nvPr/>
+        </p:nvSpPr>
+        <p:spPr>
+          <a:xfrm>
+            <a:off x="626000" y="1880000"/>
+            <a:ext cx="2100000" cy="560000"/>
+          </a:xfrm>
+          <a:prstGeom prst="rect">
+            <a:avLst/>
+          </a:prstGeom>
+          <a:solidFill>
+            <a:srgbClr val="010328"/>
           </a:solidFill>
           <a:ln>
             <a:noFill/>
@@ -26715,14 +27092,144 @@
       </p:sp>
       <p:sp>
         <p:nvSpPr>
-          <p:cNvPr id="6" name="Rectangle 5"/>
+          <p:cNvPr id="7" name="TextBox 6"/>
+          <p:cNvSpPr txBox="1"/>
+          <p:nvPr/>
+        </p:nvSpPr>
+        <p:spPr>
+          <a:xfrm>
+            <a:off x="626000" y="2030000"/>
+            <a:ext cx="2100000" cy="320000"/>
+          </a:xfrm>
+          <a:prstGeom prst="rect">
+            <a:avLst/>
+          </a:prstGeom>
+          <a:noFill/>
+        </p:spPr>
+        <p:txBody>
+          <a:bodyPr wrap="square" anchor="t">
+            <a:spAutoFit/>
+          </a:bodyPr>
+          <a:lstStyle/>
+          <a:p>
+            <a:pPr algn="ctr">
+              <a:lnSpc>
+                <a:spcPct val="110000"/>
+              </a:lnSpc>
+              <a:spcAft>
+                <a:spcPts val="600"/>
+              </a:spcAft>
+            </a:pPr>
+            <a:r>
+              <a:rPr sz="1450" b="1">
+                <a:solidFill>
+                  <a:srgbClr val="FFFFFF"/>
+                </a:solidFill>
+                <a:latin typeface="微软雅黑"/>
+              </a:rPr>
+              <a:t>课程性质</a:t>
+            </a:r>
+          </a:p>
+        </p:txBody>
+      </p:sp>
+      <p:sp>
+        <p:nvSpPr>
+          <p:cNvPr id="8" name="TextBox 7"/>
+          <p:cNvSpPr txBox="1"/>
+          <p:nvPr/>
+        </p:nvSpPr>
+        <p:spPr>
+          <a:xfrm>
+            <a:off x="756000" y="2540000"/>
+            <a:ext cx="1840000" cy="3490000"/>
+          </a:xfrm>
+          <a:prstGeom prst="rect">
+            <a:avLst/>
+          </a:prstGeom>
+          <a:noFill/>
+        </p:spPr>
+        <p:txBody>
+          <a:bodyPr wrap="square" anchor="t">
+            <a:spAutoFit/>
+          </a:bodyPr>
+          <a:lstStyle/>
+          <a:p>
+            <a:pPr algn="l">
+              <a:lnSpc>
+                <a:spcPct val="130000"/>
+              </a:lnSpc>
+              <a:spcAft>
+                <a:spcPts val="600"/>
+              </a:spcAft>
+            </a:pPr>
+            <a:r>
+              <a:rPr sz="1150" b="0">
+                <a:solidFill>
+                  <a:srgbClr val="010328"/>
+                </a:solidFill>
+                <a:latin typeface="微软雅黑"/>
+              </a:rPr>
+              <a:t>本课程是工业互联网应用专业的核心基础课程，旨在培养面向零编程基础或基础薄弱大一新生的Python编程能力，特别是面向对象编程思想、第三方库应用和工业数据处理能力。</a:t>
+            </a:r>
+          </a:p>
+        </p:txBody>
+      </p:sp>
+      <p:sp>
+        <p:nvSpPr>
+          <p:cNvPr id="9" name="Rectangle 8"/>
           <p:cNvSpPr/>
           <p:nvPr/>
         </p:nvSpPr>
         <p:spPr>
           <a:xfrm>
-            <a:off x="760000" y="1750000"/>
-            <a:ext cx="150000" cy="880000"/>
+            <a:off x="2836000" y="1880000"/>
+            <a:ext cx="2100000" cy="4270000"/>
+          </a:xfrm>
+          <a:prstGeom prst="rect">
+            <a:avLst/>
+          </a:prstGeom>
+          <a:solidFill>
+            <a:srgbClr val="F3F6FD"/>
+          </a:solidFill>
+          <a:ln>
+            <a:solidFill>
+              <a:srgbClr val="0545E8"/>
+            </a:solidFill>
+          </a:ln>
+          <a:effectLst/>
+        </p:spPr>
+        <p:style>
+          <a:lnRef idx="1">
+            <a:schemeClr val="accent1"/>
+          </a:lnRef>
+          <a:fillRef idx="3">
+            <a:schemeClr val="accent1"/>
+          </a:fillRef>
+          <a:effectRef idx="2">
+            <a:schemeClr val="accent1"/>
+          </a:effectRef>
+          <a:fontRef idx="minor">
+            <a:schemeClr val="lt1"/>
+          </a:fontRef>
+        </p:style>
+        <p:txBody>
+          <a:bodyPr rtlCol="0" anchor="ctr"/>
+          <a:lstStyle/>
+          <a:p>
+            <a:pPr algn="ctr"/>
+          </a:p>
+        </p:txBody>
+      </p:sp>
+      <p:sp>
+        <p:nvSpPr>
+          <p:cNvPr id="10" name="Rectangle 9"/>
+          <p:cNvSpPr/>
+          <p:nvPr/>
+        </p:nvSpPr>
+        <p:spPr>
+          <a:xfrm>
+            <a:off x="2836000" y="1880000"/>
+            <a:ext cx="2100000" cy="560000"/>
           </a:xfrm>
           <a:prstGeom prst="rect">
             <a:avLst/>
@@ -26759,14 +27266,14 @@
       </p:sp>
       <p:sp>
         <p:nvSpPr>
-          <p:cNvPr id="7" name="TextBox 6"/>
+          <p:cNvPr id="11" name="TextBox 10"/>
           <p:cNvSpPr txBox="1"/>
           <p:nvPr/>
         </p:nvSpPr>
         <p:spPr>
           <a:xfrm>
-            <a:off x="1030000" y="1990000"/>
-            <a:ext cx="2300000" cy="400000"/>
+            <a:off x="2836000" y="2030000"/>
+            <a:ext cx="2100000" cy="320000"/>
           </a:xfrm>
           <a:prstGeom prst="rect">
             <a:avLst/>
@@ -26779,7 +27286,7 @@
           </a:bodyPr>
           <a:lstStyle/>
           <a:p>
-            <a:pPr algn="l">
+            <a:pPr algn="ctr">
               <a:lnSpc>
                 <a:spcPct val="110000"/>
               </a:lnSpc>
@@ -26788,75 +27295,121 @@
               </a:spcAft>
             </a:pPr>
             <a:r>
-              <a:rPr sz="1400" b="1">
-                <a:solidFill>
-                  <a:srgbClr val="0545E8"/>
-                </a:solidFill>
-                <a:latin typeface="微软雅黑"/>
-              </a:rPr>
-              <a:t>课程性质</a:t>
-            </a:r>
-          </a:p>
-        </p:txBody>
-      </p:sp>
-      <p:sp>
-        <p:nvSpPr>
-          <p:cNvPr id="8" name="TextBox 7"/>
+              <a:rPr sz="1450" b="1">
+                <a:solidFill>
+                  <a:srgbClr val="FFFFFF"/>
+                </a:solidFill>
+                <a:latin typeface="微软雅黑"/>
+              </a:rPr>
+              <a:t>面向岗位</a:t>
+            </a:r>
+          </a:p>
+        </p:txBody>
+      </p:sp>
+      <p:sp>
+        <p:nvSpPr>
+          <p:cNvPr id="12" name="TextBox 11"/>
           <p:cNvSpPr txBox="1"/>
           <p:nvPr/>
         </p:nvSpPr>
         <p:spPr>
           <a:xfrm>
-            <a:off x="3500000" y="1840000"/>
-            <a:ext cx="9100000" cy="720000"/>
-          </a:xfrm>
-          <a:prstGeom prst="rect">
-            <a:avLst/>
-          </a:prstGeom>
-          <a:noFill/>
-        </p:spPr>
-        <p:txBody>
-          <a:bodyPr wrap="square" anchor="ctr">
+            <a:off x="2966000" y="2540000"/>
+            <a:ext cx="1840000" cy="3490000"/>
+          </a:xfrm>
+          <a:prstGeom prst="rect">
+            <a:avLst/>
+          </a:prstGeom>
+          <a:noFill/>
+        </p:spPr>
+        <p:txBody>
+          <a:bodyPr wrap="square" anchor="t">
             <a:spAutoFit/>
           </a:bodyPr>
           <a:lstStyle/>
           <a:p>
             <a:pPr algn="l">
               <a:lnSpc>
-                <a:spcPct val="115000"/>
-              </a:lnSpc>
-              <a:spcAft>
-                <a:spcPts val="600"/>
-              </a:spcAft>
-            </a:pPr>
-            <a:r>
-              <a:rPr sz="1200" b="0">
+                <a:spcPct val="130000"/>
+              </a:lnSpc>
+              <a:spcAft>
+                <a:spcPts val="600"/>
+              </a:spcAft>
+            </a:pPr>
+            <a:r>
+              <a:rPr sz="1150" b="0">
                 <a:solidFill>
                   <a:srgbClr val="010328"/>
                 </a:solidFill>
                 <a:latin typeface="微软雅黑"/>
               </a:rPr>
-              <a:t>本课程是工业互联网应用专业的核心基础课程，旨在培养面向零编程基础或基础薄弱大一新生的Python编程能力，特别是面向对象编程思想、第三方库应用和工业数据处理能力。</a:t>
-            </a:r>
-          </a:p>
-        </p:txBody>
-      </p:sp>
-      <p:sp>
-        <p:nvSpPr>
-          <p:cNvPr id="9" name="Rectangle 8"/>
+              <a:t>工业数据采集技术员、边缘计算运维员、工业网络实施与运维工程师、工业互联网平台运维员</a:t>
+            </a:r>
+          </a:p>
+        </p:txBody>
+      </p:sp>
+      <p:sp>
+        <p:nvSpPr>
+          <p:cNvPr id="13" name="Rectangle 12"/>
           <p:cNvSpPr/>
           <p:nvPr/>
         </p:nvSpPr>
         <p:spPr>
           <a:xfrm>
-            <a:off x="760000" y="2740000"/>
-            <a:ext cx="10900000" cy="880000"/>
+            <a:off x="5046000" y="1880000"/>
+            <a:ext cx="2100000" cy="4270000"/>
           </a:xfrm>
           <a:prstGeom prst="rect">
             <a:avLst/>
           </a:prstGeom>
           <a:solidFill>
             <a:srgbClr val="F3F6FD"/>
+          </a:solidFill>
+          <a:ln>
+            <a:solidFill>
+              <a:srgbClr val="0545E8"/>
+            </a:solidFill>
+          </a:ln>
+          <a:effectLst/>
+        </p:spPr>
+        <p:style>
+          <a:lnRef idx="1">
+            <a:schemeClr val="accent1"/>
+          </a:lnRef>
+          <a:fillRef idx="3">
+            <a:schemeClr val="accent1"/>
+          </a:fillRef>
+          <a:effectRef idx="2">
+            <a:schemeClr val="accent1"/>
+          </a:effectRef>
+          <a:fontRef idx="minor">
+            <a:schemeClr val="lt1"/>
+          </a:fontRef>
+        </p:style>
+        <p:txBody>
+          <a:bodyPr rtlCol="0" anchor="ctr"/>
+          <a:lstStyle/>
+          <a:p>
+            <a:pPr algn="ctr"/>
+          </a:p>
+        </p:txBody>
+      </p:sp>
+      <p:sp>
+        <p:nvSpPr>
+          <p:cNvPr id="14" name="Rectangle 13"/>
+          <p:cNvSpPr/>
+          <p:nvPr/>
+        </p:nvSpPr>
+        <p:spPr>
+          <a:xfrm>
+            <a:off x="5046000" y="1880000"/>
+            <a:ext cx="2100000" cy="560000"/>
+          </a:xfrm>
+          <a:prstGeom prst="rect">
+            <a:avLst/>
+          </a:prstGeom>
+          <a:solidFill>
+            <a:srgbClr val="0475B6"/>
           </a:solidFill>
           <a:ln>
             <a:noFill/>
@@ -26887,20 +27440,150 @@
       </p:sp>
       <p:sp>
         <p:nvSpPr>
-          <p:cNvPr id="10" name="Rectangle 9"/>
+          <p:cNvPr id="15" name="TextBox 14"/>
+          <p:cNvSpPr txBox="1"/>
+          <p:nvPr/>
+        </p:nvSpPr>
+        <p:spPr>
+          <a:xfrm>
+            <a:off x="5046000" y="2030000"/>
+            <a:ext cx="2100000" cy="320000"/>
+          </a:xfrm>
+          <a:prstGeom prst="rect">
+            <a:avLst/>
+          </a:prstGeom>
+          <a:noFill/>
+        </p:spPr>
+        <p:txBody>
+          <a:bodyPr wrap="square" anchor="t">
+            <a:spAutoFit/>
+          </a:bodyPr>
+          <a:lstStyle/>
+          <a:p>
+            <a:pPr algn="ctr">
+              <a:lnSpc>
+                <a:spcPct val="110000"/>
+              </a:lnSpc>
+              <a:spcAft>
+                <a:spcPts val="600"/>
+              </a:spcAft>
+            </a:pPr>
+            <a:r>
+              <a:rPr sz="1450" b="1">
+                <a:solidFill>
+                  <a:srgbClr val="FFFFFF"/>
+                </a:solidFill>
+                <a:latin typeface="微软雅黑"/>
+              </a:rPr>
+              <a:t>学时学分</a:t>
+            </a:r>
+          </a:p>
+        </p:txBody>
+      </p:sp>
+      <p:sp>
+        <p:nvSpPr>
+          <p:cNvPr id="16" name="TextBox 15"/>
+          <p:cNvSpPr txBox="1"/>
+          <p:nvPr/>
+        </p:nvSpPr>
+        <p:spPr>
+          <a:xfrm>
+            <a:off x="5176000" y="2540000"/>
+            <a:ext cx="1840000" cy="3490000"/>
+          </a:xfrm>
+          <a:prstGeom prst="rect">
+            <a:avLst/>
+          </a:prstGeom>
+          <a:noFill/>
+        </p:spPr>
+        <p:txBody>
+          <a:bodyPr wrap="square" anchor="t">
+            <a:spAutoFit/>
+          </a:bodyPr>
+          <a:lstStyle/>
+          <a:p>
+            <a:pPr algn="l">
+              <a:lnSpc>
+                <a:spcPct val="130000"/>
+              </a:lnSpc>
+              <a:spcAft>
+                <a:spcPts val="600"/>
+              </a:spcAft>
+            </a:pPr>
+            <a:r>
+              <a:rPr sz="1150" b="0">
+                <a:solidFill>
+                  <a:srgbClr val="010328"/>
+                </a:solidFill>
+                <a:latin typeface="微软雅黑"/>
+              </a:rPr>
+              <a:t>48学时（理论24+实训24）· 3学分 · 第1-12周（大一新生）</a:t>
+            </a:r>
+          </a:p>
+        </p:txBody>
+      </p:sp>
+      <p:sp>
+        <p:nvSpPr>
+          <p:cNvPr id="17" name="Rectangle 16"/>
           <p:cNvSpPr/>
           <p:nvPr/>
         </p:nvSpPr>
         <p:spPr>
           <a:xfrm>
-            <a:off x="760000" y="2740000"/>
-            <a:ext cx="150000" cy="880000"/>
+            <a:off x="7256000" y="1880000"/>
+            <a:ext cx="2100000" cy="4270000"/>
           </a:xfrm>
           <a:prstGeom prst="rect">
             <a:avLst/>
           </a:prstGeom>
           <a:solidFill>
-            <a:srgbClr val="0545E8"/>
+            <a:srgbClr val="F3F6FD"/>
+          </a:solidFill>
+          <a:ln>
+            <a:solidFill>
+              <a:srgbClr val="0545E8"/>
+            </a:solidFill>
+          </a:ln>
+          <a:effectLst/>
+        </p:spPr>
+        <p:style>
+          <a:lnRef idx="1">
+            <a:schemeClr val="accent1"/>
+          </a:lnRef>
+          <a:fillRef idx="3">
+            <a:schemeClr val="accent1"/>
+          </a:fillRef>
+          <a:effectRef idx="2">
+            <a:schemeClr val="accent1"/>
+          </a:effectRef>
+          <a:fontRef idx="minor">
+            <a:schemeClr val="lt1"/>
+          </a:fontRef>
+        </p:style>
+        <p:txBody>
+          <a:bodyPr rtlCol="0" anchor="ctr"/>
+          <a:lstStyle/>
+          <a:p>
+            <a:pPr algn="ctr"/>
+          </a:p>
+        </p:txBody>
+      </p:sp>
+      <p:sp>
+        <p:nvSpPr>
+          <p:cNvPr id="18" name="Rectangle 17"/>
+          <p:cNvSpPr/>
+          <p:nvPr/>
+        </p:nvSpPr>
+        <p:spPr>
+          <a:xfrm>
+            <a:off x="7256000" y="1880000"/>
+            <a:ext cx="2100000" cy="560000"/>
+          </a:xfrm>
+          <a:prstGeom prst="rect">
+            <a:avLst/>
+          </a:prstGeom>
+          <a:solidFill>
+            <a:srgbClr val="F5670F"/>
           </a:solidFill>
           <a:ln>
             <a:noFill/>
@@ -26931,14 +27614,14 @@
       </p:sp>
       <p:sp>
         <p:nvSpPr>
-          <p:cNvPr id="11" name="TextBox 10"/>
+          <p:cNvPr id="19" name="TextBox 18"/>
           <p:cNvSpPr txBox="1"/>
           <p:nvPr/>
         </p:nvSpPr>
         <p:spPr>
           <a:xfrm>
-            <a:off x="1030000" y="2980000"/>
-            <a:ext cx="2300000" cy="400000"/>
+            <a:off x="7256000" y="2030000"/>
+            <a:ext cx="2100000" cy="320000"/>
           </a:xfrm>
           <a:prstGeom prst="rect">
             <a:avLst/>
@@ -26951,7 +27634,7 @@
           </a:bodyPr>
           <a:lstStyle/>
           <a:p>
-            <a:pPr algn="l">
+            <a:pPr algn="ctr">
               <a:lnSpc>
                 <a:spcPct val="110000"/>
               </a:lnSpc>
@@ -26960,75 +27643,121 @@
               </a:spcAft>
             </a:pPr>
             <a:r>
-              <a:rPr sz="1400" b="1">
-                <a:solidFill>
-                  <a:srgbClr val="0545E8"/>
-                </a:solidFill>
-                <a:latin typeface="微软雅黑"/>
-              </a:rPr>
-              <a:t>面向岗位</a:t>
-            </a:r>
-          </a:p>
-        </p:txBody>
-      </p:sp>
-      <p:sp>
-        <p:nvSpPr>
-          <p:cNvPr id="12" name="TextBox 11"/>
+              <a:rPr sz="1450" b="1">
+                <a:solidFill>
+                  <a:srgbClr val="FFFFFF"/>
+                </a:solidFill>
+                <a:latin typeface="微软雅黑"/>
+              </a:rPr>
+              <a:t>对接证书</a:t>
+            </a:r>
+          </a:p>
+        </p:txBody>
+      </p:sp>
+      <p:sp>
+        <p:nvSpPr>
+          <p:cNvPr id="20" name="TextBox 19"/>
           <p:cNvSpPr txBox="1"/>
           <p:nvPr/>
         </p:nvSpPr>
         <p:spPr>
           <a:xfrm>
-            <a:off x="3500000" y="2830000"/>
-            <a:ext cx="9100000" cy="720000"/>
-          </a:xfrm>
-          <a:prstGeom prst="rect">
-            <a:avLst/>
-          </a:prstGeom>
-          <a:noFill/>
-        </p:spPr>
-        <p:txBody>
-          <a:bodyPr wrap="square" anchor="ctr">
+            <a:off x="7386000" y="2540000"/>
+            <a:ext cx="1840000" cy="3490000"/>
+          </a:xfrm>
+          <a:prstGeom prst="rect">
+            <a:avLst/>
+          </a:prstGeom>
+          <a:noFill/>
+        </p:spPr>
+        <p:txBody>
+          <a:bodyPr wrap="square" anchor="t">
             <a:spAutoFit/>
           </a:bodyPr>
           <a:lstStyle/>
           <a:p>
             <a:pPr algn="l">
               <a:lnSpc>
-                <a:spcPct val="115000"/>
-              </a:lnSpc>
-              <a:spcAft>
-                <a:spcPts val="600"/>
-              </a:spcAft>
-            </a:pPr>
-            <a:r>
-              <a:rPr sz="1200" b="0">
+                <a:spcPct val="130000"/>
+              </a:lnSpc>
+              <a:spcAft>
+                <a:spcPts val="600"/>
+              </a:spcAft>
+            </a:pPr>
+            <a:r>
+              <a:rPr sz="1150" b="0">
                 <a:solidFill>
                   <a:srgbClr val="010328"/>
                 </a:solidFill>
                 <a:latin typeface="微软雅黑"/>
               </a:rPr>
-              <a:t>工业数据采集技术员、边缘计算运维员、工业网络实施与运维工程师、工业互联网平台运维员</a:t>
-            </a:r>
-          </a:p>
-        </p:txBody>
-      </p:sp>
-      <p:sp>
-        <p:nvSpPr>
-          <p:cNvPr id="13" name="Rectangle 12"/>
+              <a:t>Python开发职业技能等级证书（工信部）</a:t>
+            </a:r>
+          </a:p>
+        </p:txBody>
+      </p:sp>
+      <p:sp>
+        <p:nvSpPr>
+          <p:cNvPr id="21" name="Rectangle 20"/>
           <p:cNvSpPr/>
           <p:nvPr/>
         </p:nvSpPr>
         <p:spPr>
           <a:xfrm>
-            <a:off x="760000" y="3730000"/>
-            <a:ext cx="10900000" cy="880000"/>
+            <a:off x="9466000" y="1880000"/>
+            <a:ext cx="2100000" cy="4270000"/>
           </a:xfrm>
           <a:prstGeom prst="rect">
             <a:avLst/>
           </a:prstGeom>
           <a:solidFill>
             <a:srgbClr val="F3F6FD"/>
+          </a:solidFill>
+          <a:ln>
+            <a:solidFill>
+              <a:srgbClr val="0545E8"/>
+            </a:solidFill>
+          </a:ln>
+          <a:effectLst/>
+        </p:spPr>
+        <p:style>
+          <a:lnRef idx="1">
+            <a:schemeClr val="accent1"/>
+          </a:lnRef>
+          <a:fillRef idx="3">
+            <a:schemeClr val="accent1"/>
+          </a:fillRef>
+          <a:effectRef idx="2">
+            <a:schemeClr val="accent1"/>
+          </a:effectRef>
+          <a:fontRef idx="minor">
+            <a:schemeClr val="lt1"/>
+          </a:fontRef>
+        </p:style>
+        <p:txBody>
+          <a:bodyPr rtlCol="0" anchor="ctr"/>
+          <a:lstStyle/>
+          <a:p>
+            <a:pPr algn="ctr"/>
+          </a:p>
+        </p:txBody>
+      </p:sp>
+      <p:sp>
+        <p:nvSpPr>
+          <p:cNvPr id="22" name="Rectangle 21"/>
+          <p:cNvSpPr/>
+          <p:nvPr/>
+        </p:nvSpPr>
+        <p:spPr>
+          <a:xfrm>
+            <a:off x="9466000" y="1880000"/>
+            <a:ext cx="2100000" cy="560000"/>
+          </a:xfrm>
+          <a:prstGeom prst="rect">
+            <a:avLst/>
+          </a:prstGeom>
+          <a:solidFill>
+            <a:srgbClr val="44546A"/>
           </a:solidFill>
           <a:ln>
             <a:noFill/>
@@ -27059,58 +27788,14 @@
       </p:sp>
       <p:sp>
         <p:nvSpPr>
-          <p:cNvPr id="14" name="Rectangle 13"/>
-          <p:cNvSpPr/>
-          <p:nvPr/>
-        </p:nvSpPr>
-        <p:spPr>
-          <a:xfrm>
-            <a:off x="760000" y="3730000"/>
-            <a:ext cx="150000" cy="880000"/>
-          </a:xfrm>
-          <a:prstGeom prst="rect">
-            <a:avLst/>
-          </a:prstGeom>
-          <a:solidFill>
-            <a:srgbClr val="0545E8"/>
-          </a:solidFill>
-          <a:ln>
-            <a:noFill/>
-          </a:ln>
-          <a:effectLst/>
-        </p:spPr>
-        <p:style>
-          <a:lnRef idx="1">
-            <a:schemeClr val="accent1"/>
-          </a:lnRef>
-          <a:fillRef idx="3">
-            <a:schemeClr val="accent1"/>
-          </a:fillRef>
-          <a:effectRef idx="2">
-            <a:schemeClr val="accent1"/>
-          </a:effectRef>
-          <a:fontRef idx="minor">
-            <a:schemeClr val="lt1"/>
-          </a:fontRef>
-        </p:style>
-        <p:txBody>
-          <a:bodyPr rtlCol="0" anchor="ctr"/>
-          <a:lstStyle/>
-          <a:p>
-            <a:pPr algn="ctr"/>
-          </a:p>
-        </p:txBody>
-      </p:sp>
-      <p:sp>
-        <p:nvSpPr>
-          <p:cNvPr id="15" name="TextBox 14"/>
+          <p:cNvPr id="23" name="TextBox 22"/>
           <p:cNvSpPr txBox="1"/>
           <p:nvPr/>
         </p:nvSpPr>
         <p:spPr>
           <a:xfrm>
-            <a:off x="1030000" y="3970000"/>
-            <a:ext cx="2300000" cy="400000"/>
+            <a:off x="9466000" y="2030000"/>
+            <a:ext cx="2100000" cy="320000"/>
           </a:xfrm>
           <a:prstGeom prst="rect">
             <a:avLst/>
@@ -27123,7 +27808,7 @@
           </a:bodyPr>
           <a:lstStyle/>
           <a:p>
-            <a:pPr algn="l">
+            <a:pPr algn="ctr">
               <a:lnSpc>
                 <a:spcPct val="110000"/>
               </a:lnSpc>
@@ -27132,157 +27817,27 @@
               </a:spcAft>
             </a:pPr>
             <a:r>
-              <a:rPr sz="1400" b="1">
-                <a:solidFill>
-                  <a:srgbClr val="0545E8"/>
-                </a:solidFill>
-                <a:latin typeface="微软雅黑"/>
-              </a:rPr>
-              <a:t>学时学分</a:t>
-            </a:r>
-          </a:p>
-        </p:txBody>
-      </p:sp>
-      <p:sp>
-        <p:nvSpPr>
-          <p:cNvPr id="16" name="TextBox 15"/>
+              <a:rPr sz="1450" b="1">
+                <a:solidFill>
+                  <a:srgbClr val="FFFFFF"/>
+                </a:solidFill>
+                <a:latin typeface="微软雅黑"/>
+              </a:rPr>
+              <a:t>课程衔接</a:t>
+            </a:r>
+          </a:p>
+        </p:txBody>
+      </p:sp>
+      <p:sp>
+        <p:nvSpPr>
+          <p:cNvPr id="24" name="TextBox 23"/>
           <p:cNvSpPr txBox="1"/>
           <p:nvPr/>
         </p:nvSpPr>
         <p:spPr>
           <a:xfrm>
-            <a:off x="3500000" y="3820000"/>
-            <a:ext cx="9100000" cy="720000"/>
-          </a:xfrm>
-          <a:prstGeom prst="rect">
-            <a:avLst/>
-          </a:prstGeom>
-          <a:noFill/>
-        </p:spPr>
-        <p:txBody>
-          <a:bodyPr wrap="square" anchor="ctr">
-            <a:spAutoFit/>
-          </a:bodyPr>
-          <a:lstStyle/>
-          <a:p>
-            <a:pPr algn="l">
-              <a:lnSpc>
-                <a:spcPct val="115000"/>
-              </a:lnSpc>
-              <a:spcAft>
-                <a:spcPts val="600"/>
-              </a:spcAft>
-            </a:pPr>
-            <a:r>
-              <a:rPr sz="1200" b="0">
-                <a:solidFill>
-                  <a:srgbClr val="010328"/>
-                </a:solidFill>
-                <a:latin typeface="微软雅黑"/>
-              </a:rPr>
-              <a:t>48学时（理论24+实训24）· 3学分 · 第1-12周（大一新生）</a:t>
-            </a:r>
-          </a:p>
-        </p:txBody>
-      </p:sp>
-      <p:sp>
-        <p:nvSpPr>
-          <p:cNvPr id="17" name="Rectangle 16"/>
-          <p:cNvSpPr/>
-          <p:nvPr/>
-        </p:nvSpPr>
-        <p:spPr>
-          <a:xfrm>
-            <a:off x="760000" y="4720000"/>
-            <a:ext cx="10900000" cy="880000"/>
-          </a:xfrm>
-          <a:prstGeom prst="rect">
-            <a:avLst/>
-          </a:prstGeom>
-          <a:solidFill>
-            <a:srgbClr val="F3F6FD"/>
-          </a:solidFill>
-          <a:ln>
-            <a:noFill/>
-          </a:ln>
-          <a:effectLst/>
-        </p:spPr>
-        <p:style>
-          <a:lnRef idx="1">
-            <a:schemeClr val="accent1"/>
-          </a:lnRef>
-          <a:fillRef idx="3">
-            <a:schemeClr val="accent1"/>
-          </a:fillRef>
-          <a:effectRef idx="2">
-            <a:schemeClr val="accent1"/>
-          </a:effectRef>
-          <a:fontRef idx="minor">
-            <a:schemeClr val="lt1"/>
-          </a:fontRef>
-        </p:style>
-        <p:txBody>
-          <a:bodyPr rtlCol="0" anchor="ctr"/>
-          <a:lstStyle/>
-          <a:p>
-            <a:pPr algn="ctr"/>
-          </a:p>
-        </p:txBody>
-      </p:sp>
-      <p:sp>
-        <p:nvSpPr>
-          <p:cNvPr id="18" name="Rectangle 17"/>
-          <p:cNvSpPr/>
-          <p:nvPr/>
-        </p:nvSpPr>
-        <p:spPr>
-          <a:xfrm>
-            <a:off x="760000" y="4720000"/>
-            <a:ext cx="150000" cy="880000"/>
-          </a:xfrm>
-          <a:prstGeom prst="rect">
-            <a:avLst/>
-          </a:prstGeom>
-          <a:solidFill>
-            <a:srgbClr val="0545E8"/>
-          </a:solidFill>
-          <a:ln>
-            <a:noFill/>
-          </a:ln>
-          <a:effectLst/>
-        </p:spPr>
-        <p:style>
-          <a:lnRef idx="1">
-            <a:schemeClr val="accent1"/>
-          </a:lnRef>
-          <a:fillRef idx="3">
-            <a:schemeClr val="accent1"/>
-          </a:fillRef>
-          <a:effectRef idx="2">
-            <a:schemeClr val="accent1"/>
-          </a:effectRef>
-          <a:fontRef idx="minor">
-            <a:schemeClr val="lt1"/>
-          </a:fontRef>
-        </p:style>
-        <p:txBody>
-          <a:bodyPr rtlCol="0" anchor="ctr"/>
-          <a:lstStyle/>
-          <a:p>
-            <a:pPr algn="ctr"/>
-          </a:p>
-        </p:txBody>
-      </p:sp>
-      <p:sp>
-        <p:nvSpPr>
-          <p:cNvPr id="19" name="TextBox 18"/>
-          <p:cNvSpPr txBox="1"/>
-          <p:nvPr/>
-        </p:nvSpPr>
-        <p:spPr>
-          <a:xfrm>
-            <a:off x="1030000" y="4960000"/>
-            <a:ext cx="2300000" cy="400000"/>
+            <a:off x="9596000" y="2540000"/>
+            <a:ext cx="1840000" cy="3490000"/>
           </a:xfrm>
           <a:prstGeom prst="rect">
             <a:avLst/>
@@ -27297,228 +27852,14 @@
           <a:p>
             <a:pPr algn="l">
               <a:lnSpc>
-                <a:spcPct val="110000"/>
-              </a:lnSpc>
-              <a:spcAft>
-                <a:spcPts val="600"/>
-              </a:spcAft>
-            </a:pPr>
-            <a:r>
-              <a:rPr sz="1400" b="1">
-                <a:solidFill>
-                  <a:srgbClr val="0545E8"/>
-                </a:solidFill>
-                <a:latin typeface="微软雅黑"/>
-              </a:rPr>
-              <a:t>对接证书</a:t>
-            </a:r>
-          </a:p>
-        </p:txBody>
-      </p:sp>
-      <p:sp>
-        <p:nvSpPr>
-          <p:cNvPr id="20" name="TextBox 19"/>
-          <p:cNvSpPr txBox="1"/>
-          <p:nvPr/>
-        </p:nvSpPr>
-        <p:spPr>
-          <a:xfrm>
-            <a:off x="3500000" y="4810000"/>
-            <a:ext cx="9100000" cy="720000"/>
-          </a:xfrm>
-          <a:prstGeom prst="rect">
-            <a:avLst/>
-          </a:prstGeom>
-          <a:noFill/>
-        </p:spPr>
-        <p:txBody>
-          <a:bodyPr wrap="square" anchor="ctr">
-            <a:spAutoFit/>
-          </a:bodyPr>
-          <a:lstStyle/>
-          <a:p>
-            <a:pPr algn="l">
-              <a:lnSpc>
-                <a:spcPct val="115000"/>
-              </a:lnSpc>
-              <a:spcAft>
-                <a:spcPts val="600"/>
-              </a:spcAft>
-            </a:pPr>
-            <a:r>
-              <a:rPr sz="1200" b="0">
-                <a:solidFill>
-                  <a:srgbClr val="010328"/>
-                </a:solidFill>
-                <a:latin typeface="微软雅黑"/>
-              </a:rPr>
-              <a:t>Python开发职业技能等级证书（工信部）</a:t>
-            </a:r>
-          </a:p>
-        </p:txBody>
-      </p:sp>
-      <p:sp>
-        <p:nvSpPr>
-          <p:cNvPr id="21" name="Rectangle 20"/>
-          <p:cNvSpPr/>
-          <p:nvPr/>
-        </p:nvSpPr>
-        <p:spPr>
-          <a:xfrm>
-            <a:off x="760000" y="5710000"/>
-            <a:ext cx="10900000" cy="880000"/>
-          </a:xfrm>
-          <a:prstGeom prst="rect">
-            <a:avLst/>
-          </a:prstGeom>
-          <a:solidFill>
-            <a:srgbClr val="F3F6FD"/>
-          </a:solidFill>
-          <a:ln>
-            <a:noFill/>
-          </a:ln>
-          <a:effectLst/>
-        </p:spPr>
-        <p:style>
-          <a:lnRef idx="1">
-            <a:schemeClr val="accent1"/>
-          </a:lnRef>
-          <a:fillRef idx="3">
-            <a:schemeClr val="accent1"/>
-          </a:fillRef>
-          <a:effectRef idx="2">
-            <a:schemeClr val="accent1"/>
-          </a:effectRef>
-          <a:fontRef idx="minor">
-            <a:schemeClr val="lt1"/>
-          </a:fontRef>
-        </p:style>
-        <p:txBody>
-          <a:bodyPr rtlCol="0" anchor="ctr"/>
-          <a:lstStyle/>
-          <a:p>
-            <a:pPr algn="ctr"/>
-          </a:p>
-        </p:txBody>
-      </p:sp>
-      <p:sp>
-        <p:nvSpPr>
-          <p:cNvPr id="22" name="Rectangle 21"/>
-          <p:cNvSpPr/>
-          <p:nvPr/>
-        </p:nvSpPr>
-        <p:spPr>
-          <a:xfrm>
-            <a:off x="760000" y="5710000"/>
-            <a:ext cx="150000" cy="880000"/>
-          </a:xfrm>
-          <a:prstGeom prst="rect">
-            <a:avLst/>
-          </a:prstGeom>
-          <a:solidFill>
-            <a:srgbClr val="0545E8"/>
-          </a:solidFill>
-          <a:ln>
-            <a:noFill/>
-          </a:ln>
-          <a:effectLst/>
-        </p:spPr>
-        <p:style>
-          <a:lnRef idx="1">
-            <a:schemeClr val="accent1"/>
-          </a:lnRef>
-          <a:fillRef idx="3">
-            <a:schemeClr val="accent1"/>
-          </a:fillRef>
-          <a:effectRef idx="2">
-            <a:schemeClr val="accent1"/>
-          </a:effectRef>
-          <a:fontRef idx="minor">
-            <a:schemeClr val="lt1"/>
-          </a:fontRef>
-        </p:style>
-        <p:txBody>
-          <a:bodyPr rtlCol="0" anchor="ctr"/>
-          <a:lstStyle/>
-          <a:p>
-            <a:pPr algn="ctr"/>
-          </a:p>
-        </p:txBody>
-      </p:sp>
-      <p:sp>
-        <p:nvSpPr>
-          <p:cNvPr id="23" name="TextBox 22"/>
-          <p:cNvSpPr txBox="1"/>
-          <p:nvPr/>
-        </p:nvSpPr>
-        <p:spPr>
-          <a:xfrm>
-            <a:off x="1030000" y="5950000"/>
-            <a:ext cx="2300000" cy="400000"/>
-          </a:xfrm>
-          <a:prstGeom prst="rect">
-            <a:avLst/>
-          </a:prstGeom>
-          <a:noFill/>
-        </p:spPr>
-        <p:txBody>
-          <a:bodyPr wrap="square" anchor="t">
-            <a:spAutoFit/>
-          </a:bodyPr>
-          <a:lstStyle/>
-          <a:p>
-            <a:pPr algn="l">
-              <a:lnSpc>
-                <a:spcPct val="110000"/>
-              </a:lnSpc>
-              <a:spcAft>
-                <a:spcPts val="600"/>
-              </a:spcAft>
-            </a:pPr>
-            <a:r>
-              <a:rPr sz="1400" b="1">
-                <a:solidFill>
-                  <a:srgbClr val="0545E8"/>
-                </a:solidFill>
-                <a:latin typeface="微软雅黑"/>
-              </a:rPr>
-              <a:t>课程衔接</a:t>
-            </a:r>
-          </a:p>
-        </p:txBody>
-      </p:sp>
-      <p:sp>
-        <p:nvSpPr>
-          <p:cNvPr id="24" name="TextBox 23"/>
-          <p:cNvSpPr txBox="1"/>
-          <p:nvPr/>
-        </p:nvSpPr>
-        <p:spPr>
-          <a:xfrm>
-            <a:off x="3500000" y="5800000"/>
-            <a:ext cx="9100000" cy="720000"/>
-          </a:xfrm>
-          <a:prstGeom prst="rect">
-            <a:avLst/>
-          </a:prstGeom>
-          <a:noFill/>
-        </p:spPr>
-        <p:txBody>
-          <a:bodyPr wrap="square" anchor="ctr">
-            <a:spAutoFit/>
-          </a:bodyPr>
-          <a:lstStyle/>
-          <a:p>
-            <a:pPr algn="l">
-              <a:lnSpc>
-                <a:spcPct val="115000"/>
-              </a:lnSpc>
-              <a:spcAft>
-                <a:spcPts val="600"/>
-              </a:spcAft>
-            </a:pPr>
-            <a:r>
-              <a:rPr sz="1200" b="0">
+                <a:spcPct val="130000"/>
+              </a:lnSpc>
+              <a:spcAft>
+                <a:spcPts val="600"/>
+              </a:spcAft>
+            </a:pPr>
+            <a:r>
+              <a:rPr sz="1150" b="0">
                 <a:solidFill>
                   <a:srgbClr val="010328"/>
                 </a:solidFill>
